--- a/assets/figures-editable/c1-c2/c2-e16.pptx
+++ b/assets/figures-editable/c1-c2/c2-e16.pptx
@@ -7,7 +7,7 @@
   <p:sldIdLst>
     <p:sldId id="256" r:id="rId7"/>
   </p:sldIdLst>
-  <p:sldSz cx="11948160" cy="7924799" type="screen4x3"/>
+  <p:sldSz cx="12191695" cy="6858000" type="screen4x3"/>
   <p:notesSz cx="6858000" cy="9144000"/>
   <p:defaultTextStyle>
     <a:defPPr>
@@ -3098,14 +3098,14 @@
       <p:grpSpPr/>
       <p:sp>
         <p:nvSpPr>
-          <p:cNvPr id="2" name="text1" descr="sci-ppt:C2-E16-001"/>
+          <p:cNvPr id="2" name="C2-E16 text 0" descr="sci-ppt:o000"/>
           <p:cNvSpPr txBox="1"/>
           <p:nvPr/>
         </p:nvSpPr>
         <p:spPr>
           <a:xfrm>
-            <a:off x="316992" y="268224"/>
-            <a:ext cx="11277600" cy="359054"/>
+            <a:off x="274320" y="118872"/>
+            <a:ext cx="11612880" cy="340105"/>
           </a:xfrm>
           <a:prstGeom prst="rect">
             <a:avLst/>
@@ -3114,7 +3114,7 @@
           <a:effectLst/>
         </p:spPr>
         <p:txBody>
-          <a:bodyPr wrap="none" lIns="27432" rIns="27432" tIns="18288" bIns="18288" anchor="ctr">
+          <a:bodyPr wrap="none" lIns="18288" rIns="18288" tIns="18288" bIns="18288" anchor="t">
             <a:spAutoFit/>
           </a:bodyPr>
           <a:lstStyle/>
@@ -3125,37 +3125,1269 @@
               </a:spcAft>
             </a:pPr>
             <a:r>
-              <a:rPr sz="1823" b="0" i="0">
+              <a:rPr sz="1900" b="1" i="0">
                 <a:solidFill>
                   <a:srgbClr val="8EDBD4"/>
                 </a:solidFill>
                 <a:latin typeface="Arial"/>
               </a:rPr>
-              <a:t>C2-E16 | Physical-variable diagram</a:t>
-            </a:r>
-          </a:p>
-        </p:txBody>
-      </p:sp>
-      <p:sp>
-        <p:nvSpPr>
-          <p:cNvPr id="3" name="ellipse2" descr="sci-ppt:C2-E16-002"/>
+              <a:t>C2-E16 · Derived homogeneous barrier height</a:t>
+            </a:r>
+          </a:p>
+        </p:txBody>
+      </p:sp>
+      <p:cxnSp>
+        <p:nvCxnSpPr>
+          <p:cNvPr id="3" name="C2-E16 line 1" descr="sci-ppt:o001"/>
+          <p:cNvCxnSpPr/>
+          <p:nvPr/>
+        </p:nvCxnSpPr>
+        <p:spPr>
+          <a:xfrm>
+            <a:off x="914400" y="5029200"/>
+            <a:ext cx="6035040" cy="0"/>
+          </a:xfrm>
+          <a:prstGeom prst="line">
+            <a:avLst/>
+          </a:prstGeom>
+          <a:ln w="19050">
+            <a:solidFill>
+              <a:srgbClr val="B4C7D2"/>
+            </a:solidFill>
+          </a:ln>
+          <a:effectLst/>
+        </p:spPr>
+      </p:cxnSp>
+      <p:cxnSp>
+        <p:nvCxnSpPr>
+          <p:cNvPr id="4" name="C2-E16 line 2" descr="sci-ppt:o002"/>
+          <p:cNvCxnSpPr/>
+          <p:nvPr/>
+        </p:nvCxnSpPr>
+        <p:spPr>
+          <a:xfrm>
+            <a:off x="914400" y="1371600"/>
+            <a:ext cx="0" cy="3657600"/>
+          </a:xfrm>
+          <a:prstGeom prst="line">
+            <a:avLst/>
+          </a:prstGeom>
+          <a:ln w="19050">
+            <a:solidFill>
+              <a:srgbClr val="B4C7D2"/>
+            </a:solidFill>
+          </a:ln>
+          <a:effectLst/>
+        </p:spPr>
+      </p:cxnSp>
+      <p:cxnSp>
+        <p:nvCxnSpPr>
+          <p:cNvPr id="5" name="C2-E16 line 3" descr="sci-ppt:o003"/>
+          <p:cNvCxnSpPr/>
+          <p:nvPr/>
+        </p:nvCxnSpPr>
+        <p:spPr>
+          <a:xfrm>
+            <a:off x="914400" y="5029200"/>
+            <a:ext cx="0" cy="64008"/>
+          </a:xfrm>
+          <a:prstGeom prst="line">
+            <a:avLst/>
+          </a:prstGeom>
+          <a:ln w="12700">
+            <a:solidFill>
+              <a:srgbClr val="B4C7D2"/>
+            </a:solidFill>
+          </a:ln>
+          <a:effectLst/>
+        </p:spPr>
+      </p:cxnSp>
+      <p:cxnSp>
+        <p:nvCxnSpPr>
+          <p:cNvPr id="6" name="C2-E16 line 4" descr="sci-ppt:o004"/>
+          <p:cNvCxnSpPr/>
+          <p:nvPr/>
+        </p:nvCxnSpPr>
+        <p:spPr>
+          <a:xfrm>
+            <a:off x="914400" y="1371600"/>
+            <a:ext cx="0" cy="3657600"/>
+          </a:xfrm>
+          <a:prstGeom prst="line">
+            <a:avLst/>
+          </a:prstGeom>
+          <a:ln w="7620">
+            <a:solidFill>
+              <a:srgbClr val="2E4756"/>
+            </a:solidFill>
+          </a:ln>
+          <a:effectLst/>
+        </p:spPr>
+      </p:cxnSp>
+      <p:sp>
+        <p:nvSpPr>
+          <p:cNvPr id="7" name="C2-E16 text 5" descr="sci-ppt:o005"/>
+          <p:cNvSpPr txBox="1"/>
+          <p:nvPr/>
+        </p:nvSpPr>
+        <p:spPr>
+          <a:xfrm>
+            <a:off x="457200" y="5111496"/>
+            <a:ext cx="914400" cy="208407"/>
+          </a:xfrm>
+          <a:prstGeom prst="rect">
+            <a:avLst/>
+          </a:prstGeom>
+          <a:noFill/>
+          <a:effectLst/>
+        </p:spPr>
+        <p:txBody>
+          <a:bodyPr wrap="none" lIns="18288" rIns="18288" tIns="18288" bIns="18288" anchor="t">
+            <a:spAutoFit/>
+          </a:bodyPr>
+          <a:lstStyle/>
+          <a:p>
+            <a:pPr algn="ctr">
+              <a:spcAft>
+                <a:spcPts val="0"/>
+              </a:spcAft>
+            </a:pPr>
+            <a:r>
+              <a:rPr sz="1050" b="0" i="0">
+                <a:solidFill>
+                  <a:srgbClr val="B4C7D2"/>
+                </a:solidFill>
+                <a:latin typeface="Arial"/>
+              </a:rPr>
+              <a:t>1e+05</a:t>
+            </a:r>
+          </a:p>
+        </p:txBody>
+      </p:sp>
+      <p:cxnSp>
+        <p:nvCxnSpPr>
+          <p:cNvPr id="8" name="C2-E16 line 6" descr="sci-ppt:o006"/>
+          <p:cNvCxnSpPr/>
+          <p:nvPr/>
+        </p:nvCxnSpPr>
+        <p:spPr>
+          <a:xfrm>
+            <a:off x="2926079" y="5029200"/>
+            <a:ext cx="0" cy="64008"/>
+          </a:xfrm>
+          <a:prstGeom prst="line">
+            <a:avLst/>
+          </a:prstGeom>
+          <a:ln w="12700">
+            <a:solidFill>
+              <a:srgbClr val="B4C7D2"/>
+            </a:solidFill>
+          </a:ln>
+          <a:effectLst/>
+        </p:spPr>
+      </p:cxnSp>
+      <p:cxnSp>
+        <p:nvCxnSpPr>
+          <p:cNvPr id="9" name="C2-E16 line 7" descr="sci-ppt:o007"/>
+          <p:cNvCxnSpPr/>
+          <p:nvPr/>
+        </p:nvCxnSpPr>
+        <p:spPr>
+          <a:xfrm>
+            <a:off x="2926079" y="1371600"/>
+            <a:ext cx="0" cy="3657600"/>
+          </a:xfrm>
+          <a:prstGeom prst="line">
+            <a:avLst/>
+          </a:prstGeom>
+          <a:ln w="7620">
+            <a:solidFill>
+              <a:srgbClr val="2E4756"/>
+            </a:solidFill>
+          </a:ln>
+          <a:effectLst/>
+        </p:spPr>
+      </p:cxnSp>
+      <p:sp>
+        <p:nvSpPr>
+          <p:cNvPr id="10" name="C2-E16 text 8" descr="sci-ppt:o008"/>
+          <p:cNvSpPr txBox="1"/>
+          <p:nvPr/>
+        </p:nvSpPr>
+        <p:spPr>
+          <a:xfrm>
+            <a:off x="2468879" y="5111496"/>
+            <a:ext cx="914400" cy="208407"/>
+          </a:xfrm>
+          <a:prstGeom prst="rect">
+            <a:avLst/>
+          </a:prstGeom>
+          <a:noFill/>
+          <a:effectLst/>
+        </p:spPr>
+        <p:txBody>
+          <a:bodyPr wrap="none" lIns="18288" rIns="18288" tIns="18288" bIns="18288" anchor="t">
+            <a:spAutoFit/>
+          </a:bodyPr>
+          <a:lstStyle/>
+          <a:p>
+            <a:pPr algn="ctr">
+              <a:spcAft>
+                <a:spcPts val="0"/>
+              </a:spcAft>
+            </a:pPr>
+            <a:r>
+              <a:rPr sz="1050" b="0" i="0">
+                <a:solidFill>
+                  <a:srgbClr val="B4C7D2"/>
+                </a:solidFill>
+                <a:latin typeface="Arial"/>
+              </a:rPr>
+              <a:t>1e+06</a:t>
+            </a:r>
+          </a:p>
+        </p:txBody>
+      </p:sp>
+      <p:cxnSp>
+        <p:nvCxnSpPr>
+          <p:cNvPr id="11" name="C2-E16 line 9" descr="sci-ppt:o009"/>
+          <p:cNvCxnSpPr/>
+          <p:nvPr/>
+        </p:nvCxnSpPr>
+        <p:spPr>
+          <a:xfrm>
+            <a:off x="4937759" y="5029200"/>
+            <a:ext cx="0" cy="64008"/>
+          </a:xfrm>
+          <a:prstGeom prst="line">
+            <a:avLst/>
+          </a:prstGeom>
+          <a:ln w="12700">
+            <a:solidFill>
+              <a:srgbClr val="B4C7D2"/>
+            </a:solidFill>
+          </a:ln>
+          <a:effectLst/>
+        </p:spPr>
+      </p:cxnSp>
+      <p:cxnSp>
+        <p:nvCxnSpPr>
+          <p:cNvPr id="12" name="C2-E16 line 10" descr="sci-ppt:o010"/>
+          <p:cNvCxnSpPr/>
+          <p:nvPr/>
+        </p:nvCxnSpPr>
+        <p:spPr>
+          <a:xfrm>
+            <a:off x="4937759" y="1371600"/>
+            <a:ext cx="0" cy="3657600"/>
+          </a:xfrm>
+          <a:prstGeom prst="line">
+            <a:avLst/>
+          </a:prstGeom>
+          <a:ln w="7620">
+            <a:solidFill>
+              <a:srgbClr val="2E4756"/>
+            </a:solidFill>
+          </a:ln>
+          <a:effectLst/>
+        </p:spPr>
+      </p:cxnSp>
+      <p:sp>
+        <p:nvSpPr>
+          <p:cNvPr id="13" name="C2-E16 text 11" descr="sci-ppt:o011"/>
+          <p:cNvSpPr txBox="1"/>
+          <p:nvPr/>
+        </p:nvSpPr>
+        <p:spPr>
+          <a:xfrm>
+            <a:off x="4480559" y="5111496"/>
+            <a:ext cx="914400" cy="208407"/>
+          </a:xfrm>
+          <a:prstGeom prst="rect">
+            <a:avLst/>
+          </a:prstGeom>
+          <a:noFill/>
+          <a:effectLst/>
+        </p:spPr>
+        <p:txBody>
+          <a:bodyPr wrap="none" lIns="18288" rIns="18288" tIns="18288" bIns="18288" anchor="t">
+            <a:spAutoFit/>
+          </a:bodyPr>
+          <a:lstStyle/>
+          <a:p>
+            <a:pPr algn="ctr">
+              <a:spcAft>
+                <a:spcPts val="0"/>
+              </a:spcAft>
+            </a:pPr>
+            <a:r>
+              <a:rPr sz="1050" b="0" i="0">
+                <a:solidFill>
+                  <a:srgbClr val="B4C7D2"/>
+                </a:solidFill>
+                <a:latin typeface="Arial"/>
+              </a:rPr>
+              <a:t>1e+07</a:t>
+            </a:r>
+          </a:p>
+        </p:txBody>
+      </p:sp>
+      <p:cxnSp>
+        <p:nvCxnSpPr>
+          <p:cNvPr id="14" name="C2-E16 line 12" descr="sci-ppt:o012"/>
+          <p:cNvCxnSpPr/>
+          <p:nvPr/>
+        </p:nvCxnSpPr>
+        <p:spPr>
+          <a:xfrm>
+            <a:off x="6949440" y="5029200"/>
+            <a:ext cx="0" cy="64008"/>
+          </a:xfrm>
+          <a:prstGeom prst="line">
+            <a:avLst/>
+          </a:prstGeom>
+          <a:ln w="12700">
+            <a:solidFill>
+              <a:srgbClr val="B4C7D2"/>
+            </a:solidFill>
+          </a:ln>
+          <a:effectLst/>
+        </p:spPr>
+      </p:cxnSp>
+      <p:cxnSp>
+        <p:nvCxnSpPr>
+          <p:cNvPr id="15" name="C2-E16 line 13" descr="sci-ppt:o013"/>
+          <p:cNvCxnSpPr/>
+          <p:nvPr/>
+        </p:nvCxnSpPr>
+        <p:spPr>
+          <a:xfrm>
+            <a:off x="6949440" y="1371600"/>
+            <a:ext cx="0" cy="3657600"/>
+          </a:xfrm>
+          <a:prstGeom prst="line">
+            <a:avLst/>
+          </a:prstGeom>
+          <a:ln w="7620">
+            <a:solidFill>
+              <a:srgbClr val="2E4756"/>
+            </a:solidFill>
+          </a:ln>
+          <a:effectLst/>
+        </p:spPr>
+      </p:cxnSp>
+      <p:sp>
+        <p:nvSpPr>
+          <p:cNvPr id="16" name="C2-E16 text 14" descr="sci-ppt:o014"/>
+          <p:cNvSpPr txBox="1"/>
+          <p:nvPr/>
+        </p:nvSpPr>
+        <p:spPr>
+          <a:xfrm>
+            <a:off x="6492240" y="5111496"/>
+            <a:ext cx="914400" cy="208407"/>
+          </a:xfrm>
+          <a:prstGeom prst="rect">
+            <a:avLst/>
+          </a:prstGeom>
+          <a:noFill/>
+          <a:effectLst/>
+        </p:spPr>
+        <p:txBody>
+          <a:bodyPr wrap="none" lIns="18288" rIns="18288" tIns="18288" bIns="18288" anchor="t">
+            <a:spAutoFit/>
+          </a:bodyPr>
+          <a:lstStyle/>
+          <a:p>
+            <a:pPr algn="ctr">
+              <a:spcAft>
+                <a:spcPts val="0"/>
+              </a:spcAft>
+            </a:pPr>
+            <a:r>
+              <a:rPr sz="1050" b="0" i="0">
+                <a:solidFill>
+                  <a:srgbClr val="B4C7D2"/>
+                </a:solidFill>
+                <a:latin typeface="Arial"/>
+              </a:rPr>
+              <a:t>1e+08</a:t>
+            </a:r>
+          </a:p>
+        </p:txBody>
+      </p:sp>
+      <p:cxnSp>
+        <p:nvCxnSpPr>
+          <p:cNvPr id="17" name="C2-E16 line 15" descr="sci-ppt:o015"/>
+          <p:cNvCxnSpPr/>
+          <p:nvPr/>
+        </p:nvCxnSpPr>
+        <p:spPr>
+          <a:xfrm>
+            <a:off x="850392" y="5029200"/>
+            <a:ext cx="64008" cy="0"/>
+          </a:xfrm>
+          <a:prstGeom prst="line">
+            <a:avLst/>
+          </a:prstGeom>
+          <a:ln w="12700">
+            <a:solidFill>
+              <a:srgbClr val="B4C7D2"/>
+            </a:solidFill>
+          </a:ln>
+          <a:effectLst/>
+        </p:spPr>
+      </p:cxnSp>
+      <p:cxnSp>
+        <p:nvCxnSpPr>
+          <p:cNvPr id="18" name="C2-E16 line 16" descr="sci-ppt:o016"/>
+          <p:cNvCxnSpPr/>
+          <p:nvPr/>
+        </p:nvCxnSpPr>
+        <p:spPr>
+          <a:xfrm>
+            <a:off x="850392" y="3984171"/>
+            <a:ext cx="64008" cy="0"/>
+          </a:xfrm>
+          <a:prstGeom prst="line">
+            <a:avLst/>
+          </a:prstGeom>
+          <a:ln w="12700">
+            <a:solidFill>
+              <a:srgbClr val="B4C7D2"/>
+            </a:solidFill>
+          </a:ln>
+          <a:effectLst/>
+        </p:spPr>
+      </p:cxnSp>
+      <p:cxnSp>
+        <p:nvCxnSpPr>
+          <p:cNvPr id="19" name="C2-E16 line 17" descr="sci-ppt:o017"/>
+          <p:cNvCxnSpPr/>
+          <p:nvPr/>
+        </p:nvCxnSpPr>
+        <p:spPr>
+          <a:xfrm>
+            <a:off x="914400" y="3984171"/>
+            <a:ext cx="6035040" cy="0"/>
+          </a:xfrm>
+          <a:prstGeom prst="line">
+            <a:avLst/>
+          </a:prstGeom>
+          <a:ln w="7620">
+            <a:solidFill>
+              <a:srgbClr val="2E4756"/>
+            </a:solidFill>
+          </a:ln>
+          <a:effectLst/>
+        </p:spPr>
+      </p:cxnSp>
+      <p:sp>
+        <p:nvSpPr>
+          <p:cNvPr id="20" name="C2-E16 text 18" descr="sci-ppt:o018"/>
+          <p:cNvSpPr txBox="1"/>
+          <p:nvPr/>
+        </p:nvSpPr>
+        <p:spPr>
+          <a:xfrm>
+            <a:off x="45720" y="3901875"/>
+            <a:ext cx="777240" cy="208407"/>
+          </a:xfrm>
+          <a:prstGeom prst="rect">
+            <a:avLst/>
+          </a:prstGeom>
+          <a:noFill/>
+          <a:effectLst/>
+        </p:spPr>
+        <p:txBody>
+          <a:bodyPr wrap="none" lIns="18288" rIns="18288" tIns="18288" bIns="18288" anchor="t">
+            <a:spAutoFit/>
+          </a:bodyPr>
+          <a:lstStyle/>
+          <a:p>
+            <a:pPr algn="r">
+              <a:spcAft>
+                <a:spcPts val="0"/>
+              </a:spcAft>
+            </a:pPr>
+            <a:r>
+              <a:rPr sz="1050" b="0" i="0">
+                <a:solidFill>
+                  <a:srgbClr val="B4C7D2"/>
+                </a:solidFill>
+                <a:latin typeface="Arial"/>
+              </a:rPr>
+              <a:t>1e+02</a:t>
+            </a:r>
+          </a:p>
+        </p:txBody>
+      </p:sp>
+      <p:cxnSp>
+        <p:nvCxnSpPr>
+          <p:cNvPr id="21" name="C2-E16 line 19" descr="sci-ppt:o019"/>
+          <p:cNvCxnSpPr/>
+          <p:nvPr/>
+        </p:nvCxnSpPr>
+        <p:spPr>
+          <a:xfrm>
+            <a:off x="850392" y="2939142"/>
+            <a:ext cx="64008" cy="0"/>
+          </a:xfrm>
+          <a:prstGeom prst="line">
+            <a:avLst/>
+          </a:prstGeom>
+          <a:ln w="12700">
+            <a:solidFill>
+              <a:srgbClr val="B4C7D2"/>
+            </a:solidFill>
+          </a:ln>
+          <a:effectLst/>
+        </p:spPr>
+      </p:cxnSp>
+      <p:cxnSp>
+        <p:nvCxnSpPr>
+          <p:cNvPr id="22" name="C2-E16 line 20" descr="sci-ppt:o020"/>
+          <p:cNvCxnSpPr/>
+          <p:nvPr/>
+        </p:nvCxnSpPr>
+        <p:spPr>
+          <a:xfrm>
+            <a:off x="914400" y="2939142"/>
+            <a:ext cx="6035040" cy="0"/>
+          </a:xfrm>
+          <a:prstGeom prst="line">
+            <a:avLst/>
+          </a:prstGeom>
+          <a:ln w="7620">
+            <a:solidFill>
+              <a:srgbClr val="2E4756"/>
+            </a:solidFill>
+          </a:ln>
+          <a:effectLst/>
+        </p:spPr>
+      </p:cxnSp>
+      <p:sp>
+        <p:nvSpPr>
+          <p:cNvPr id="23" name="C2-E16 text 21" descr="sci-ppt:o021"/>
+          <p:cNvSpPr txBox="1"/>
+          <p:nvPr/>
+        </p:nvSpPr>
+        <p:spPr>
+          <a:xfrm>
+            <a:off x="45720" y="2856846"/>
+            <a:ext cx="777240" cy="208407"/>
+          </a:xfrm>
+          <a:prstGeom prst="rect">
+            <a:avLst/>
+          </a:prstGeom>
+          <a:noFill/>
+          <a:effectLst/>
+        </p:spPr>
+        <p:txBody>
+          <a:bodyPr wrap="none" lIns="18288" rIns="18288" tIns="18288" bIns="18288" anchor="t">
+            <a:spAutoFit/>
+          </a:bodyPr>
+          <a:lstStyle/>
+          <a:p>
+            <a:pPr algn="r">
+              <a:spcAft>
+                <a:spcPts val="0"/>
+              </a:spcAft>
+            </a:pPr>
+            <a:r>
+              <a:rPr sz="1050" b="0" i="0">
+                <a:solidFill>
+                  <a:srgbClr val="B4C7D2"/>
+                </a:solidFill>
+                <a:latin typeface="Arial"/>
+              </a:rPr>
+              <a:t>1e+04</a:t>
+            </a:r>
+          </a:p>
+        </p:txBody>
+      </p:sp>
+      <p:cxnSp>
+        <p:nvCxnSpPr>
+          <p:cNvPr id="24" name="C2-E16 line 22" descr="sci-ppt:o022"/>
+          <p:cNvCxnSpPr/>
+          <p:nvPr/>
+        </p:nvCxnSpPr>
+        <p:spPr>
+          <a:xfrm>
+            <a:off x="850392" y="1894114"/>
+            <a:ext cx="64008" cy="0"/>
+          </a:xfrm>
+          <a:prstGeom prst="line">
+            <a:avLst/>
+          </a:prstGeom>
+          <a:ln w="12700">
+            <a:solidFill>
+              <a:srgbClr val="B4C7D2"/>
+            </a:solidFill>
+          </a:ln>
+          <a:effectLst/>
+        </p:spPr>
+      </p:cxnSp>
+      <p:cxnSp>
+        <p:nvCxnSpPr>
+          <p:cNvPr id="25" name="C2-E16 line 23" descr="sci-ppt:o023"/>
+          <p:cNvCxnSpPr/>
+          <p:nvPr/>
+        </p:nvCxnSpPr>
+        <p:spPr>
+          <a:xfrm>
+            <a:off x="914400" y="1894114"/>
+            <a:ext cx="6035040" cy="0"/>
+          </a:xfrm>
+          <a:prstGeom prst="line">
+            <a:avLst/>
+          </a:prstGeom>
+          <a:ln w="7620">
+            <a:solidFill>
+              <a:srgbClr val="2E4756"/>
+            </a:solidFill>
+          </a:ln>
+          <a:effectLst/>
+        </p:spPr>
+      </p:cxnSp>
+      <p:sp>
+        <p:nvSpPr>
+          <p:cNvPr id="26" name="C2-E16 text 24" descr="sci-ppt:o024"/>
+          <p:cNvSpPr txBox="1"/>
+          <p:nvPr/>
+        </p:nvSpPr>
+        <p:spPr>
+          <a:xfrm>
+            <a:off x="45720" y="1811818"/>
+            <a:ext cx="777240" cy="208407"/>
+          </a:xfrm>
+          <a:prstGeom prst="rect">
+            <a:avLst/>
+          </a:prstGeom>
+          <a:noFill/>
+          <a:effectLst/>
+        </p:spPr>
+        <p:txBody>
+          <a:bodyPr wrap="none" lIns="18288" rIns="18288" tIns="18288" bIns="18288" anchor="t">
+            <a:spAutoFit/>
+          </a:bodyPr>
+          <a:lstStyle/>
+          <a:p>
+            <a:pPr algn="r">
+              <a:spcAft>
+                <a:spcPts val="0"/>
+              </a:spcAft>
+            </a:pPr>
+            <a:r>
+              <a:rPr sz="1050" b="0" i="0">
+                <a:solidFill>
+                  <a:srgbClr val="B4C7D2"/>
+                </a:solidFill>
+                <a:latin typeface="Arial"/>
+              </a:rPr>
+              <a:t>1e+06</a:t>
+            </a:r>
+          </a:p>
+        </p:txBody>
+      </p:sp>
+      <p:sp>
+        <p:nvSpPr>
+          <p:cNvPr id="27" name="C2-E16 text 25" descr="sci-ppt:o025"/>
+          <p:cNvSpPr txBox="1"/>
+          <p:nvPr/>
+        </p:nvSpPr>
+        <p:spPr>
+          <a:xfrm>
+            <a:off x="914400" y="5312664"/>
+            <a:ext cx="6035040" cy="231648"/>
+          </a:xfrm>
+          <a:prstGeom prst="rect">
+            <a:avLst/>
+          </a:prstGeom>
+          <a:noFill/>
+          <a:effectLst/>
+        </p:spPr>
+        <p:txBody>
+          <a:bodyPr wrap="none" lIns="18288" rIns="18288" tIns="18288" bIns="18288" anchor="t">
+            <a:spAutoFit/>
+          </a:bodyPr>
+          <a:lstStyle/>
+          <a:p>
+            <a:pPr algn="ctr">
+              <a:spcAft>
+                <a:spcPts val="0"/>
+              </a:spcAft>
+            </a:pPr>
+            <a:r>
+              <a:rPr sz="1200" b="0" i="0">
+                <a:solidFill>
+                  <a:srgbClr val="E7F0F3"/>
+                </a:solidFill>
+                <a:latin typeface="Arial"/>
+              </a:rPr>
+              <a:t>driving pressure Δpₙ  (Pa)</a:t>
+            </a:r>
+          </a:p>
+        </p:txBody>
+      </p:sp>
+      <p:sp>
+        <p:nvSpPr>
+          <p:cNvPr id="28" name="C2-E16 text 26" descr="sci-ppt:o026"/>
+          <p:cNvSpPr txBox="1"/>
+          <p:nvPr/>
+        </p:nvSpPr>
+        <p:spPr>
+          <a:xfrm>
+            <a:off x="365760" y="1024128"/>
+            <a:ext cx="6035040" cy="231648"/>
+          </a:xfrm>
+          <a:prstGeom prst="rect">
+            <a:avLst/>
+          </a:prstGeom>
+          <a:noFill/>
+          <a:effectLst/>
+        </p:spPr>
+        <p:txBody>
+          <a:bodyPr wrap="none" lIns="18288" rIns="18288" tIns="18288" bIns="18288" anchor="t">
+            <a:spAutoFit/>
+          </a:bodyPr>
+          <a:lstStyle/>
+          <a:p>
+            <a:pPr algn="l">
+              <a:spcAft>
+                <a:spcPts val="0"/>
+              </a:spcAft>
+            </a:pPr>
+            <a:r>
+              <a:rPr sz="1200" b="0" i="0">
+                <a:solidFill>
+                  <a:srgbClr val="E7F0F3"/>
+                </a:solidFill>
+                <a:latin typeface="Arial"/>
+              </a:rPr>
+              <a:t>W* / k_B T</a:t>
+            </a:r>
+          </a:p>
+        </p:txBody>
+      </p:sp>
+      <p:sp>
+        <p:nvSpPr>
+          <p:cNvPr id="29" name="C2-E16 polygon 27" descr="sci-ppt:o027"/>
           <p:cNvSpPr/>
           <p:nvPr/>
         </p:nvSpPr>
         <p:spPr>
           <a:xfrm>
-            <a:off x="1341120" y="1280160"/>
-            <a:ext cx="2804160" cy="2804160"/>
+            <a:off x="914400" y="2116254"/>
+            <a:ext cx="5547360" cy="2881746"/>
+          </a:xfrm>
+          <a:custGeom>
+            <a:avLst/>
+            <a:gdLst/>
+            <a:ahLst/>
+            <a:cxnLst/>
+            <a:rect l="l" t="t" r="r" b="b"/>
+            <a:pathLst>
+              <a:path w="5547360" h="2881746">
+                <a:moveTo>
+                  <a:pt x="0" y="0"/>
+                </a:moveTo>
+                <a:lnTo>
+                  <a:pt x="60960" y="31668"/>
+                </a:lnTo>
+                <a:lnTo>
+                  <a:pt x="121920" y="63335"/>
+                </a:lnTo>
+                <a:lnTo>
+                  <a:pt x="182879" y="95003"/>
+                </a:lnTo>
+                <a:lnTo>
+                  <a:pt x="243839" y="126670"/>
+                </a:lnTo>
+                <a:lnTo>
+                  <a:pt x="304799" y="158338"/>
+                </a:lnTo>
+                <a:lnTo>
+                  <a:pt x="365759" y="190005"/>
+                </a:lnTo>
+                <a:lnTo>
+                  <a:pt x="426719" y="221673"/>
+                </a:lnTo>
+                <a:lnTo>
+                  <a:pt x="487679" y="253340"/>
+                </a:lnTo>
+                <a:lnTo>
+                  <a:pt x="548639" y="285008"/>
+                </a:lnTo>
+                <a:lnTo>
+                  <a:pt x="609599" y="316675"/>
+                </a:lnTo>
+                <a:lnTo>
+                  <a:pt x="670559" y="348343"/>
+                </a:lnTo>
+                <a:lnTo>
+                  <a:pt x="731519" y="380010"/>
+                </a:lnTo>
+                <a:lnTo>
+                  <a:pt x="792479" y="411678"/>
+                </a:lnTo>
+                <a:lnTo>
+                  <a:pt x="853439" y="443346"/>
+                </a:lnTo>
+                <a:lnTo>
+                  <a:pt x="914400" y="475013"/>
+                </a:lnTo>
+                <a:lnTo>
+                  <a:pt x="975359" y="506681"/>
+                </a:lnTo>
+                <a:lnTo>
+                  <a:pt x="1036320" y="538348"/>
+                </a:lnTo>
+                <a:lnTo>
+                  <a:pt x="1097279" y="570016"/>
+                </a:lnTo>
+                <a:lnTo>
+                  <a:pt x="1158240" y="601683"/>
+                </a:lnTo>
+                <a:lnTo>
+                  <a:pt x="1219200" y="633351"/>
+                </a:lnTo>
+                <a:lnTo>
+                  <a:pt x="1280160" y="665018"/>
+                </a:lnTo>
+                <a:lnTo>
+                  <a:pt x="1341120" y="696686"/>
+                </a:lnTo>
+                <a:lnTo>
+                  <a:pt x="1402080" y="728353"/>
+                </a:lnTo>
+                <a:lnTo>
+                  <a:pt x="1463040" y="760021"/>
+                </a:lnTo>
+                <a:lnTo>
+                  <a:pt x="1524000" y="791688"/>
+                </a:lnTo>
+                <a:lnTo>
+                  <a:pt x="1584960" y="823356"/>
+                </a:lnTo>
+                <a:lnTo>
+                  <a:pt x="1645920" y="855023"/>
+                </a:lnTo>
+                <a:lnTo>
+                  <a:pt x="1706880" y="886691"/>
+                </a:lnTo>
+                <a:lnTo>
+                  <a:pt x="1767840" y="918358"/>
+                </a:lnTo>
+                <a:lnTo>
+                  <a:pt x="1828800" y="950026"/>
+                </a:lnTo>
+                <a:lnTo>
+                  <a:pt x="1889760" y="981694"/>
+                </a:lnTo>
+                <a:lnTo>
+                  <a:pt x="1950720" y="1013361"/>
+                </a:lnTo>
+                <a:lnTo>
+                  <a:pt x="2011679" y="1045029"/>
+                </a:lnTo>
+                <a:lnTo>
+                  <a:pt x="2072640" y="1076696"/>
+                </a:lnTo>
+                <a:lnTo>
+                  <a:pt x="2133599" y="1108364"/>
+                </a:lnTo>
+                <a:lnTo>
+                  <a:pt x="2194559" y="1140031"/>
+                </a:lnTo>
+                <a:lnTo>
+                  <a:pt x="2255519" y="1171699"/>
+                </a:lnTo>
+                <a:lnTo>
+                  <a:pt x="2316480" y="1203366"/>
+                </a:lnTo>
+                <a:lnTo>
+                  <a:pt x="2377439" y="1235034"/>
+                </a:lnTo>
+                <a:lnTo>
+                  <a:pt x="2438399" y="1266701"/>
+                </a:lnTo>
+                <a:lnTo>
+                  <a:pt x="2499359" y="1298369"/>
+                </a:lnTo>
+                <a:lnTo>
+                  <a:pt x="2560319" y="1330036"/>
+                </a:lnTo>
+                <a:lnTo>
+                  <a:pt x="2621279" y="1361704"/>
+                </a:lnTo>
+                <a:lnTo>
+                  <a:pt x="2682240" y="1393371"/>
+                </a:lnTo>
+                <a:lnTo>
+                  <a:pt x="2743199" y="1425039"/>
+                </a:lnTo>
+                <a:lnTo>
+                  <a:pt x="2804160" y="1456707"/>
+                </a:lnTo>
+                <a:lnTo>
+                  <a:pt x="2865119" y="1488374"/>
+                </a:lnTo>
+                <a:lnTo>
+                  <a:pt x="2926080" y="1520042"/>
+                </a:lnTo>
+                <a:lnTo>
+                  <a:pt x="2987039" y="1551709"/>
+                </a:lnTo>
+                <a:lnTo>
+                  <a:pt x="3048000" y="1583377"/>
+                </a:lnTo>
+                <a:lnTo>
+                  <a:pt x="3108959" y="1615044"/>
+                </a:lnTo>
+                <a:lnTo>
+                  <a:pt x="3169920" y="1646712"/>
+                </a:lnTo>
+                <a:lnTo>
+                  <a:pt x="3230880" y="1678379"/>
+                </a:lnTo>
+                <a:lnTo>
+                  <a:pt x="3291840" y="1710047"/>
+                </a:lnTo>
+                <a:lnTo>
+                  <a:pt x="3352800" y="1741714"/>
+                </a:lnTo>
+                <a:lnTo>
+                  <a:pt x="3413760" y="1773382"/>
+                </a:lnTo>
+                <a:lnTo>
+                  <a:pt x="3474720" y="1805049"/>
+                </a:lnTo>
+                <a:lnTo>
+                  <a:pt x="3535680" y="1836717"/>
+                </a:lnTo>
+                <a:lnTo>
+                  <a:pt x="3596640" y="1868384"/>
+                </a:lnTo>
+                <a:lnTo>
+                  <a:pt x="3657600" y="1900052"/>
+                </a:lnTo>
+                <a:lnTo>
+                  <a:pt x="3718560" y="1931720"/>
+                </a:lnTo>
+                <a:lnTo>
+                  <a:pt x="3779520" y="1963387"/>
+                </a:lnTo>
+                <a:lnTo>
+                  <a:pt x="3840479" y="1995055"/>
+                </a:lnTo>
+                <a:lnTo>
+                  <a:pt x="3901440" y="2026722"/>
+                </a:lnTo>
+                <a:lnTo>
+                  <a:pt x="3962400" y="2058390"/>
+                </a:lnTo>
+                <a:lnTo>
+                  <a:pt x="4023359" y="2090057"/>
+                </a:lnTo>
+                <a:lnTo>
+                  <a:pt x="4084320" y="2121725"/>
+                </a:lnTo>
+                <a:lnTo>
+                  <a:pt x="4145280" y="2153392"/>
+                </a:lnTo>
+                <a:lnTo>
+                  <a:pt x="4206240" y="2185060"/>
+                </a:lnTo>
+                <a:lnTo>
+                  <a:pt x="4267199" y="2216727"/>
+                </a:lnTo>
+                <a:lnTo>
+                  <a:pt x="4328159" y="2248395"/>
+                </a:lnTo>
+                <a:lnTo>
+                  <a:pt x="4389119" y="2280062"/>
+                </a:lnTo>
+                <a:lnTo>
+                  <a:pt x="4450080" y="2311730"/>
+                </a:lnTo>
+                <a:lnTo>
+                  <a:pt x="4511039" y="2343397"/>
+                </a:lnTo>
+                <a:lnTo>
+                  <a:pt x="4572000" y="2375065"/>
+                </a:lnTo>
+                <a:lnTo>
+                  <a:pt x="4632960" y="2406733"/>
+                </a:lnTo>
+                <a:lnTo>
+                  <a:pt x="4693920" y="2438400"/>
+                </a:lnTo>
+                <a:lnTo>
+                  <a:pt x="4754879" y="2470068"/>
+                </a:lnTo>
+                <a:lnTo>
+                  <a:pt x="4815840" y="2501735"/>
+                </a:lnTo>
+                <a:lnTo>
+                  <a:pt x="4876799" y="2533403"/>
+                </a:lnTo>
+                <a:lnTo>
+                  <a:pt x="4937760" y="2565070"/>
+                </a:lnTo>
+                <a:lnTo>
+                  <a:pt x="4998719" y="2596738"/>
+                </a:lnTo>
+                <a:lnTo>
+                  <a:pt x="5059680" y="2628405"/>
+                </a:lnTo>
+                <a:lnTo>
+                  <a:pt x="5120639" y="2660073"/>
+                </a:lnTo>
+                <a:lnTo>
+                  <a:pt x="5181600" y="2691740"/>
+                </a:lnTo>
+                <a:lnTo>
+                  <a:pt x="5242559" y="2723408"/>
+                </a:lnTo>
+                <a:lnTo>
+                  <a:pt x="5303520" y="2755075"/>
+                </a:lnTo>
+                <a:lnTo>
+                  <a:pt x="5364480" y="2786743"/>
+                </a:lnTo>
+                <a:lnTo>
+                  <a:pt x="5425440" y="2818410"/>
+                </a:lnTo>
+                <a:lnTo>
+                  <a:pt x="5486400" y="2850078"/>
+                </a:lnTo>
+                <a:lnTo>
+                  <a:pt x="5547360" y="2881746"/>
+                </a:lnTo>
+              </a:path>
+            </a:pathLst>
+          </a:custGeom>
+          <a:noFill/>
+          <a:ln w="38100">
+            <a:solidFill>
+              <a:srgbClr val="8EDBD4"/>
+            </a:solidFill>
+          </a:ln>
+          <a:effectLst/>
+        </p:spPr>
+        <p:txBody>
+          <a:bodyPr rtlCol="0" anchor="ctr"/>
+          <a:lstStyle/>
+          <a:p>
+            <a:pPr algn="ctr"/>
+          </a:p>
+        </p:txBody>
+      </p:sp>
+      <p:sp>
+        <p:nvSpPr>
+          <p:cNvPr id="30" name="C2-E16 ellipse 28" descr="sci-ppt:o028"/>
+          <p:cNvSpPr/>
+          <p:nvPr/>
+        </p:nvSpPr>
+        <p:spPr>
+          <a:xfrm>
+            <a:off x="2852927" y="3088131"/>
+            <a:ext cx="146304" cy="146304"/>
           </a:xfrm>
           <a:prstGeom prst="ellipse">
+            <a:avLst/>
+          </a:prstGeom>
+          <a:solidFill>
+            <a:srgbClr val="F2B880"/>
+          </a:solidFill>
+          <a:ln w="12700">
+            <a:solidFill>
+              <a:srgbClr val="F2B880"/>
+            </a:solidFill>
+          </a:ln>
+          <a:effectLst/>
+        </p:spPr>
+        <p:txBody>
+          <a:bodyPr rtlCol="0" anchor="ctr"/>
+          <a:lstStyle/>
+          <a:p>
+            <a:pPr algn="ctr"/>
+          </a:p>
+        </p:txBody>
+      </p:sp>
+      <p:sp>
+        <p:nvSpPr>
+          <p:cNvPr id="31" name="C2-E16 text 29" descr="sci-ppt:o029"/>
+          <p:cNvSpPr txBox="1"/>
+          <p:nvPr/>
+        </p:nvSpPr>
+        <p:spPr>
+          <a:xfrm>
+            <a:off x="3017520" y="2704083"/>
+            <a:ext cx="2560320" cy="231648"/>
+          </a:xfrm>
+          <a:prstGeom prst="rect">
+            <a:avLst/>
+          </a:prstGeom>
+          <a:noFill/>
+          <a:effectLst/>
+        </p:spPr>
+        <p:txBody>
+          <a:bodyPr wrap="none" lIns="18288" rIns="18288" tIns="18288" bIns="18288" anchor="t">
+            <a:spAutoFit/>
+          </a:bodyPr>
+          <a:lstStyle/>
+          <a:p>
+            <a:pPr algn="l">
+              <a:spcAft>
+                <a:spcPts val="0"/>
+              </a:spcAft>
+            </a:pPr>
+            <a:r>
+              <a:rPr sz="1200" b="0" i="0">
+                <a:solidFill>
+                  <a:srgbClr val="F2B880"/>
+                </a:solidFill>
+                <a:latin typeface="Arial"/>
+              </a:rPr>
+              <a:t>Δp = 10 bar: 3,757 k_BT</a:t>
+            </a:r>
+          </a:p>
+        </p:txBody>
+      </p:sp>
+      <p:sp>
+        <p:nvSpPr>
+          <p:cNvPr id="32" name="C2-E16 ellipse 30" descr="sci-ppt:o030"/>
+          <p:cNvSpPr/>
+          <p:nvPr/>
+        </p:nvSpPr>
+        <p:spPr>
+          <a:xfrm>
+            <a:off x="4864607" y="4133159"/>
+            <a:ext cx="146304" cy="146304"/>
+          </a:xfrm>
+          <a:prstGeom prst="ellipse">
+            <a:avLst/>
+          </a:prstGeom>
+          <a:solidFill>
+            <a:srgbClr val="F28BA0"/>
+          </a:solidFill>
+          <a:ln w="12700">
+            <a:solidFill>
+              <a:srgbClr val="F28BA0"/>
+            </a:solidFill>
+          </a:ln>
+          <a:effectLst/>
+        </p:spPr>
+        <p:txBody>
+          <a:bodyPr rtlCol="0" anchor="ctr"/>
+          <a:lstStyle/>
+          <a:p>
+            <a:pPr algn="ctr"/>
+          </a:p>
+        </p:txBody>
+      </p:sp>
+      <p:sp>
+        <p:nvSpPr>
+          <p:cNvPr id="33" name="C2-E16 text 31" descr="sci-ppt:o031"/>
+          <p:cNvSpPr txBox="1"/>
+          <p:nvPr/>
+        </p:nvSpPr>
+        <p:spPr>
+          <a:xfrm>
+            <a:off x="5029199" y="3749111"/>
+            <a:ext cx="2560320" cy="231648"/>
+          </a:xfrm>
+          <a:prstGeom prst="rect">
+            <a:avLst/>
+          </a:prstGeom>
+          <a:noFill/>
+          <a:effectLst/>
+        </p:spPr>
+        <p:txBody>
+          <a:bodyPr wrap="none" lIns="18288" rIns="18288" tIns="18288" bIns="18288" anchor="t">
+            <a:spAutoFit/>
+          </a:bodyPr>
+          <a:lstStyle/>
+          <a:p>
+            <a:pPr algn="l">
+              <a:spcAft>
+                <a:spcPts val="0"/>
+              </a:spcAft>
+            </a:pPr>
+            <a:r>
+              <a:rPr sz="1200" b="0" i="0">
+                <a:solidFill>
+                  <a:srgbClr val="F28BA0"/>
+                </a:solidFill>
+                <a:latin typeface="Arial"/>
+              </a:rPr>
+              <a:t>Δp = 100 bar: 38 k_BT</a:t>
+            </a:r>
+          </a:p>
+        </p:txBody>
+      </p:sp>
+      <p:sp>
+        <p:nvSpPr>
+          <p:cNvPr id="34" name="C2-E16 text 32" descr="sci-ppt:o032"/>
+          <p:cNvSpPr txBox="1"/>
+          <p:nvPr/>
+        </p:nvSpPr>
+        <p:spPr>
+          <a:xfrm>
+            <a:off x="1593128" y="2075885"/>
+            <a:ext cx="1097280" cy="239395"/>
+          </a:xfrm>
+          <a:prstGeom prst="rect">
+            <a:avLst/>
+          </a:prstGeom>
+          <a:noFill/>
+          <a:effectLst/>
+        </p:spPr>
+        <p:txBody>
+          <a:bodyPr wrap="none" lIns="18288" rIns="18288" tIns="18288" bIns="18288" anchor="t">
+            <a:spAutoFit/>
+          </a:bodyPr>
+          <a:lstStyle/>
+          <a:p>
+            <a:pPr algn="l">
+              <a:spcAft>
+                <a:spcPts val="0"/>
+              </a:spcAft>
+            </a:pPr>
+            <a:r>
+              <a:rPr sz="1250" b="0" i="0">
+                <a:solidFill>
+                  <a:srgbClr val="8EDBD4"/>
+                </a:solidFill>
+                <a:latin typeface="Arial"/>
+              </a:rPr>
+              <a:t>slope −2</a:t>
+            </a:r>
+          </a:p>
+        </p:txBody>
+      </p:sp>
+      <p:sp>
+        <p:nvSpPr>
+          <p:cNvPr id="35" name="C2-E16 round_rect 33" descr="sci-ppt:o033"/>
+          <p:cNvSpPr/>
+          <p:nvPr/>
+        </p:nvSpPr>
+        <p:spPr>
+          <a:xfrm>
+            <a:off x="7498079" y="1371600"/>
+            <a:ext cx="4343400" cy="3657600"/>
+          </a:xfrm>
+          <a:prstGeom prst="roundRect">
             <a:avLst/>
           </a:prstGeom>
           <a:solidFill>
             <a:srgbClr val="213E4B"/>
           </a:solidFill>
-          <a:ln w="21590">
+          <a:ln w="20320">
             <a:solidFill>
-              <a:srgbClr val="B4C7D2"/>
+              <a:srgbClr val="8EDBD4"/>
             </a:solidFill>
           </a:ln>
           <a:effectLst/>
@@ -3170,46 +4402,14 @@
       </p:sp>
       <p:sp>
         <p:nvSpPr>
-          <p:cNvPr id="4" name="ellipse3" descr="sci-ppt:C2-E16-003"/>
-          <p:cNvSpPr/>
-          <p:nvPr/>
-        </p:nvSpPr>
-        <p:spPr>
-          <a:xfrm>
-            <a:off x="2389632" y="2328672"/>
-            <a:ext cx="707136" cy="707136"/>
-          </a:xfrm>
-          <a:prstGeom prst="ellipse">
-            <a:avLst/>
-          </a:prstGeom>
-          <a:solidFill>
-            <a:srgbClr val="F6BC77"/>
-          </a:solidFill>
-          <a:ln w="21590">
-            <a:solidFill>
-              <a:srgbClr val="B4C7D2"/>
-            </a:solidFill>
-          </a:ln>
-          <a:effectLst/>
-        </p:spPr>
-        <p:txBody>
-          <a:bodyPr rtlCol="0" anchor="ctr"/>
-          <a:lstStyle/>
-          <a:p>
-            <a:pPr algn="ctr"/>
-          </a:p>
-        </p:txBody>
-      </p:sp>
-      <p:sp>
-        <p:nvSpPr>
-          <p:cNvPr id="5" name="text4" descr="sci-ppt:C2-E16-004"/>
+          <p:cNvPr id="36" name="C2-E16 text 34" descr="sci-ppt:o034"/>
           <p:cNvSpPr txBox="1"/>
           <p:nvPr/>
         </p:nvSpPr>
         <p:spPr>
           <a:xfrm>
-            <a:off x="1706880" y="853440"/>
-            <a:ext cx="4876800" cy="359054"/>
+            <a:off x="7607807" y="1426464"/>
+            <a:ext cx="4123944" cy="254889"/>
           </a:xfrm>
           <a:prstGeom prst="rect">
             <a:avLst/>
@@ -3218,7 +4418,7 @@
           <a:effectLst/>
         </p:spPr>
         <p:txBody>
-          <a:bodyPr wrap="none" lIns="27432" rIns="27432" tIns="18288" bIns="18288" anchor="ctr">
+          <a:bodyPr wrap="none" lIns="18288" rIns="18288" tIns="18288" bIns="18288" anchor="t">
             <a:spAutoFit/>
           </a:bodyPr>
           <a:lstStyle/>
@@ -3229,27 +4429,67 @@
               </a:spcAft>
             </a:pPr>
             <a:r>
-              <a:rPr sz="1823" b="0" i="0">
+              <a:rPr sz="1350" b="1" i="0">
+                <a:solidFill>
+                  <a:srgbClr val="8EDBD4"/>
+                </a:solidFill>
+                <a:latin typeface="Arial"/>
+              </a:rPr>
+              <a:t>The barrier does not vanish</a:t>
+            </a:r>
+          </a:p>
+        </p:txBody>
+      </p:sp>
+      <p:sp>
+        <p:nvSpPr>
+          <p:cNvPr id="37" name="C2-E16 text 35" descr="sci-ppt:o035"/>
+          <p:cNvSpPr txBox="1"/>
+          <p:nvPr/>
+        </p:nvSpPr>
+        <p:spPr>
+          <a:xfrm>
+            <a:off x="7635240" y="1828800"/>
+            <a:ext cx="4114800" cy="262636"/>
+          </a:xfrm>
+          <a:prstGeom prst="rect">
+            <a:avLst/>
+          </a:prstGeom>
+          <a:noFill/>
+          <a:effectLst/>
+        </p:spPr>
+        <p:txBody>
+          <a:bodyPr wrap="none" lIns="18288" rIns="18288" tIns="18288" bIns="18288" anchor="t">
+            <a:spAutoFit/>
+          </a:bodyPr>
+          <a:lstStyle/>
+          <a:p>
+            <a:pPr algn="l">
+              <a:spcAft>
+                <a:spcPts val="0"/>
+              </a:spcAft>
+            </a:pPr>
+            <a:r>
+              <a:rPr sz="1400" b="1" i="0">
                 <a:solidFill>
                   <a:srgbClr val="E7F0F3"/>
                 </a:solidFill>
                 <a:latin typeface="Arial"/>
               </a:rPr>
-              <a:t>Finite PFC liquid: p_d</a:t>
-            </a:r>
-          </a:p>
-        </p:txBody>
-      </p:sp>
-      <p:sp>
-        <p:nvSpPr>
-          <p:cNvPr id="6" name="text5" descr="sci-ppt:C2-E16-005"/>
+              <a:t>W* = 16π σᵥₚ³ / (3 Δpₙ²)</a:t>
+            </a:r>
+          </a:p>
+        </p:txBody>
+      </p:sp>
+      <p:sp>
+        <p:nvSpPr>
+          <p:cNvPr id="38" name="C2-E16 text 36" descr="sci-ppt:o036"/>
           <p:cNvSpPr txBox="1"/>
           <p:nvPr/>
         </p:nvSpPr>
         <p:spPr>
           <a:xfrm>
-            <a:off x="1341120" y="4267200"/>
-            <a:ext cx="5608320" cy="321259"/>
+            <a:off x="7635240" y="2377440"/>
+            <a:ext cx="4114800" cy="417576"/>
           </a:xfrm>
           <a:prstGeom prst="rect">
             <a:avLst/>
@@ -3258,7 +4498,7 @@
           <a:effectLst/>
         </p:spPr>
         <p:txBody>
-          <a:bodyPr wrap="none" lIns="27432" rIns="27432" tIns="18288" bIns="18288" anchor="ctr">
+          <a:bodyPr wrap="none" lIns="18288" rIns="18288" tIns="18288" bIns="18288" anchor="t">
             <a:spAutoFit/>
           </a:bodyPr>
           <a:lstStyle/>
@@ -3269,75 +4509,131 @@
               </a:spcAft>
             </a:pPr>
             <a:r>
-              <a:rPr sz="1632" b="0" i="0">
+              <a:rPr sz="1200" b="0" i="0">
+                <a:solidFill>
+                  <a:srgbClr val="B4C7D2"/>
+                </a:solidFill>
+                <a:latin typeface="Arial"/>
+              </a:rPr>
+              <a:t>Derivation: W(r*) = (16 − 32/3) π σ³/Δp² = (16/3)</a:t>
+            </a:r>
+          </a:p>
+          <a:p>
+            <a:pPr algn="l">
+              <a:spcAft>
+                <a:spcPts val="0"/>
+              </a:spcAft>
+            </a:pPr>
+            <a:r>
+              <a:rPr sz="1200" b="0" i="0">
+                <a:solidFill>
+                  <a:srgbClr val="B4C7D2"/>
+                </a:solidFill>
+                <a:latin typeface="Arial"/>
+              </a:rPr>
+              <a:t>π σ³/Δp²</a:t>
+            </a:r>
+          </a:p>
+        </p:txBody>
+      </p:sp>
+      <p:sp>
+        <p:nvSpPr>
+          <p:cNvPr id="39" name="C2-E16 text 37" descr="sci-ppt:o037"/>
+          <p:cNvSpPr txBox="1"/>
+          <p:nvPr/>
+        </p:nvSpPr>
+        <p:spPr>
+          <a:xfrm>
+            <a:off x="7836408" y="3108960"/>
+            <a:ext cx="3913632" cy="433070"/>
+          </a:xfrm>
+          <a:prstGeom prst="rect">
+            <a:avLst/>
+          </a:prstGeom>
+          <a:noFill/>
+          <a:effectLst/>
+        </p:spPr>
+        <p:txBody>
+          <a:bodyPr wrap="none" lIns="18288" rIns="18288" tIns="18288" bIns="18288" anchor="t">
+            <a:spAutoFit/>
+          </a:bodyPr>
+          <a:lstStyle/>
+          <a:p>
+            <a:pPr algn="l">
+              <a:spcAft>
+                <a:spcPts val="0"/>
+              </a:spcAft>
+            </a:pPr>
+            <a:r>
+              <a:rPr sz="1250" b="0" i="0">
                 <a:solidFill>
                   <a:srgbClr val="E7F0F3"/>
                 </a:solidFill>
                 <a:latin typeface="Arial"/>
               </a:rPr>
-              <a:t>Inner interface σ_vp; outer σ_pc</a:t>
-            </a:r>
-          </a:p>
-        </p:txBody>
-      </p:sp>
-      <p:cxnSp>
-        <p:nvCxnSpPr>
-          <p:cNvPr id="7" name="arrow6" descr="sci-ppt:C2-E16-006"/>
-          <p:cNvCxnSpPr/>
+              <a:t>Positive superheat shrinks the barrier but</a:t>
+            </a:r>
+          </a:p>
+          <a:p>
+            <a:pPr algn="l">
+              <a:spcAft>
+                <a:spcPts val="0"/>
+              </a:spcAft>
+            </a:pPr>
+            <a:r>
+              <a:rPr sz="1250" b="0" i="0">
+                <a:solidFill>
+                  <a:srgbClr val="E7F0F3"/>
+                </a:solidFill>
+                <a:latin typeface="Arial"/>
+              </a:rPr>
+              <a:t>never removes it.</a:t>
+            </a:r>
+          </a:p>
+        </p:txBody>
+      </p:sp>
+      <p:sp>
+        <p:nvSpPr>
+          <p:cNvPr id="40" name="C2-E16 ellipse 38" descr="sci-ppt:o038"/>
+          <p:cNvSpPr/>
           <p:nvPr/>
-        </p:nvCxnSpPr>
-        <p:spPr>
-          <a:xfrm>
-            <a:off x="6705600" y="3901440"/>
-            <a:ext cx="4267200" cy="0"/>
-          </a:xfrm>
-          <a:prstGeom prst="line">
+        </p:nvSpPr>
+        <p:spPr>
+          <a:xfrm>
+            <a:off x="7667244" y="3166237"/>
+            <a:ext cx="82296" cy="82296"/>
+          </a:xfrm>
+          <a:prstGeom prst="ellipse">
             <a:avLst/>
           </a:prstGeom>
-          <a:ln w="25400">
+          <a:solidFill>
+            <a:srgbClr val="8EDBD4"/>
+          </a:solidFill>
+          <a:ln w="12700">
             <a:solidFill>
               <a:srgbClr val="8EDBD4"/>
             </a:solidFill>
-            <a:headEnd type="none" w="med" len="med"/>
-            <a:tailEnd type="triangle" w="med" len="med"/>
           </a:ln>
           <a:effectLst/>
         </p:spPr>
-      </p:cxnSp>
-      <p:cxnSp>
-        <p:nvCxnSpPr>
-          <p:cNvPr id="8" name="arrow7" descr="sci-ppt:C2-E16-007"/>
-          <p:cNvCxnSpPr/>
-          <p:nvPr/>
-        </p:nvCxnSpPr>
-        <p:spPr>
-          <a:xfrm flipV="1">
-            <a:off x="6705600" y="1463040"/>
-            <a:ext cx="0" cy="2438400"/>
-          </a:xfrm>
-          <a:prstGeom prst="line">
-            <a:avLst/>
-          </a:prstGeom>
-          <a:ln w="25400">
-            <a:solidFill>
-              <a:srgbClr val="8EDBD4"/>
-            </a:solidFill>
-            <a:headEnd type="none" w="med" len="med"/>
-            <a:tailEnd type="triangle" w="med" len="med"/>
-          </a:ln>
-          <a:effectLst/>
-        </p:spPr>
-      </p:cxnSp>
-      <p:sp>
-        <p:nvSpPr>
-          <p:cNvPr id="9" name="text8" descr="sci-ppt:C2-E16-008"/>
+        <p:txBody>
+          <a:bodyPr rtlCol="0" anchor="ctr"/>
+          <a:lstStyle/>
+          <a:p>
+            <a:pPr algn="ctr"/>
+          </a:p>
+        </p:txBody>
+      </p:sp>
+      <p:sp>
+        <p:nvSpPr>
+          <p:cNvPr id="41" name="C2-E16 text 39" descr="sci-ppt:o039"/>
           <p:cNvSpPr txBox="1"/>
           <p:nvPr/>
         </p:nvSpPr>
         <p:spPr>
           <a:xfrm>
-            <a:off x="9997440" y="4023360"/>
-            <a:ext cx="1828800" cy="321259"/>
+            <a:off x="7836408" y="3587749"/>
+            <a:ext cx="3913632" cy="433070"/>
           </a:xfrm>
           <a:prstGeom prst="rect">
             <a:avLst/>
@@ -3346,7 +4642,7 @@
           <a:effectLst/>
         </p:spPr>
         <p:txBody>
-          <a:bodyPr wrap="none" lIns="27432" rIns="27432" tIns="18288" bIns="18288" anchor="ctr">
+          <a:bodyPr wrap="none" lIns="18288" rIns="18288" tIns="18288" bIns="18288" anchor="t">
             <a:spAutoFit/>
           </a:bodyPr>
           <a:lstStyle/>
@@ -3357,27 +4653,75 @@
               </a:spcAft>
             </a:pPr>
             <a:r>
-              <a:rPr sz="1632" b="0" i="0">
+              <a:rPr sz="1250" b="0" i="0">
                 <a:solidFill>
                   <a:srgbClr val="E7F0F3"/>
                 </a:solidFill>
                 <a:latin typeface="Arial"/>
               </a:rPr>
-              <a:t>r_n</a:t>
-            </a:r>
-          </a:p>
-        </p:txBody>
-      </p:sp>
-      <p:sp>
-        <p:nvSpPr>
-          <p:cNvPr id="10" name="text9" descr="sci-ppt:C2-E16-009"/>
+              <a:t>Relative to thermal energy k_B T the barrier</a:t>
+            </a:r>
+          </a:p>
+          <a:p>
+            <a:pPr algn="l">
+              <a:spcAft>
+                <a:spcPts val="0"/>
+              </a:spcAft>
+            </a:pPr>
+            <a:r>
+              <a:rPr sz="1250" b="0" i="0">
+                <a:solidFill>
+                  <a:srgbClr val="E7F0F3"/>
+                </a:solidFill>
+                <a:latin typeface="Arial"/>
+              </a:rPr>
+              <a:t>is still thousands of units at 10 bar.</a:t>
+            </a:r>
+          </a:p>
+        </p:txBody>
+      </p:sp>
+      <p:sp>
+        <p:nvSpPr>
+          <p:cNvPr id="42" name="C2-E16 ellipse 40" descr="sci-ppt:o040"/>
+          <p:cNvSpPr/>
+          <p:nvPr/>
+        </p:nvSpPr>
+        <p:spPr>
+          <a:xfrm>
+            <a:off x="7667244" y="3645027"/>
+            <a:ext cx="82296" cy="82296"/>
+          </a:xfrm>
+          <a:prstGeom prst="ellipse">
+            <a:avLst/>
+          </a:prstGeom>
+          <a:solidFill>
+            <a:srgbClr val="8EDBD4"/>
+          </a:solidFill>
+          <a:ln w="12700">
+            <a:solidFill>
+              <a:srgbClr val="8EDBD4"/>
+            </a:solidFill>
+          </a:ln>
+          <a:effectLst/>
+        </p:spPr>
+        <p:txBody>
+          <a:bodyPr rtlCol="0" anchor="ctr"/>
+          <a:lstStyle/>
+          <a:p>
+            <a:pPr algn="ctr"/>
+          </a:p>
+        </p:txBody>
+      </p:sp>
+      <p:sp>
+        <p:nvSpPr>
+          <p:cNvPr id="43" name="C2-E16 text 41" descr="sci-ppt:o041"/>
           <p:cNvSpPr txBox="1"/>
           <p:nvPr/>
         </p:nvSpPr>
         <p:spPr>
           <a:xfrm>
-            <a:off x="6583680" y="1097280"/>
-            <a:ext cx="3657600" cy="321259"/>
+            <a:off x="914400" y="5733288"/>
+            <a:ext cx="10972800" cy="239395"/>
           </a:xfrm>
           <a:prstGeom prst="rect">
             <a:avLst/>
@@ -3386,7 +4730,7 @@
           <a:effectLst/>
         </p:spPr>
         <p:txBody>
-          <a:bodyPr wrap="none" lIns="27432" rIns="27432" tIns="18288" bIns="18288" anchor="ctr">
+          <a:bodyPr wrap="none" lIns="18288" rIns="18288" tIns="18288" bIns="18288" anchor="t">
             <a:spAutoFit/>
           </a:bodyPr>
           <a:lstStyle/>
@@ -3397,907 +4741,27 @@
               </a:spcAft>
             </a:pPr>
             <a:r>
-              <a:rPr sz="1632" b="0" i="0">
+              <a:rPr sz="1250" b="0" i="0">
                 <a:solidFill>
-                  <a:srgbClr val="E7F0F3"/>
+                  <a:srgbClr val="B4C7D2"/>
                 </a:solidFill>
                 <a:latin typeface="Arial"/>
               </a:rPr>
-              <a:t>W</a:t>
-            </a:r>
-          </a:p>
-        </p:txBody>
-      </p:sp>
-      <p:cxnSp>
-        <p:nvCxnSpPr>
-          <p:cNvPr id="11" name="line10" descr="sci-ppt:C2-E16-010"/>
-          <p:cNvCxnSpPr/>
-          <p:nvPr/>
-        </p:nvCxnSpPr>
-        <p:spPr>
-          <a:xfrm flipV="1">
-            <a:off x="6766560" y="3896425"/>
-            <a:ext cx="100584" cy="5015"/>
-          </a:xfrm>
-          <a:prstGeom prst="line">
-            <a:avLst/>
-          </a:prstGeom>
-          <a:ln w="25400">
-            <a:solidFill>
-              <a:srgbClr val="8EDBD4"/>
-            </a:solidFill>
-          </a:ln>
-          <a:effectLst/>
-        </p:spPr>
-      </p:cxnSp>
-      <p:cxnSp>
-        <p:nvCxnSpPr>
-          <p:cNvPr id="12" name="line11" descr="sci-ppt:C2-E16-011"/>
-          <p:cNvCxnSpPr/>
-          <p:nvPr/>
-        </p:nvCxnSpPr>
-        <p:spPr>
-          <a:xfrm flipV="1">
-            <a:off x="6867144" y="3881894"/>
-            <a:ext cx="100584" cy="14531"/>
-          </a:xfrm>
-          <a:prstGeom prst="line">
-            <a:avLst/>
-          </a:prstGeom>
-          <a:ln w="25400">
-            <a:solidFill>
-              <a:srgbClr val="8EDBD4"/>
-            </a:solidFill>
-          </a:ln>
-          <a:effectLst/>
-        </p:spPr>
-      </p:cxnSp>
-      <p:cxnSp>
-        <p:nvCxnSpPr>
-          <p:cNvPr id="13" name="line12" descr="sci-ppt:C2-E16-012"/>
-          <p:cNvCxnSpPr/>
-          <p:nvPr/>
-        </p:nvCxnSpPr>
-        <p:spPr>
-          <a:xfrm flipV="1">
-            <a:off x="6967728" y="3858620"/>
-            <a:ext cx="100584" cy="23274"/>
-          </a:xfrm>
-          <a:prstGeom prst="line">
-            <a:avLst/>
-          </a:prstGeom>
-          <a:ln w="25400">
-            <a:solidFill>
-              <a:srgbClr val="8EDBD4"/>
-            </a:solidFill>
-          </a:ln>
-          <a:effectLst/>
-        </p:spPr>
-      </p:cxnSp>
-      <p:cxnSp>
-        <p:nvCxnSpPr>
-          <p:cNvPr id="14" name="line13" descr="sci-ppt:C2-E16-013"/>
-          <p:cNvCxnSpPr/>
-          <p:nvPr/>
-        </p:nvCxnSpPr>
-        <p:spPr>
-          <a:xfrm flipV="1">
-            <a:off x="7068312" y="3827373"/>
-            <a:ext cx="100584" cy="31247"/>
-          </a:xfrm>
-          <a:prstGeom prst="line">
-            <a:avLst/>
-          </a:prstGeom>
-          <a:ln w="25400">
-            <a:solidFill>
-              <a:srgbClr val="8EDBD4"/>
-            </a:solidFill>
-          </a:ln>
-          <a:effectLst/>
-        </p:spPr>
-      </p:cxnSp>
-      <p:cxnSp>
-        <p:nvCxnSpPr>
-          <p:cNvPr id="15" name="line14" descr="sci-ppt:C2-E16-014"/>
-          <p:cNvCxnSpPr/>
-          <p:nvPr/>
-        </p:nvCxnSpPr>
-        <p:spPr>
-          <a:xfrm flipV="1">
-            <a:off x="7168896" y="3788925"/>
-            <a:ext cx="100584" cy="38448"/>
-          </a:xfrm>
-          <a:prstGeom prst="line">
-            <a:avLst/>
-          </a:prstGeom>
-          <a:ln w="25400">
-            <a:solidFill>
-              <a:srgbClr val="8EDBD4"/>
-            </a:solidFill>
-          </a:ln>
-          <a:effectLst/>
-        </p:spPr>
-      </p:cxnSp>
-      <p:cxnSp>
-        <p:nvCxnSpPr>
-          <p:cNvPr id="16" name="line15" descr="sci-ppt:C2-E16-015"/>
-          <p:cNvCxnSpPr/>
-          <p:nvPr/>
-        </p:nvCxnSpPr>
-        <p:spPr>
-          <a:xfrm flipV="1">
-            <a:off x="7269480" y="3744048"/>
-            <a:ext cx="100584" cy="44877"/>
-          </a:xfrm>
-          <a:prstGeom prst="line">
-            <a:avLst/>
-          </a:prstGeom>
-          <a:ln w="25400">
-            <a:solidFill>
-              <a:srgbClr val="8EDBD4"/>
-            </a:solidFill>
-          </a:ln>
-          <a:effectLst/>
-        </p:spPr>
-      </p:cxnSp>
-      <p:cxnSp>
-        <p:nvCxnSpPr>
-          <p:cNvPr id="17" name="line16" descr="sci-ppt:C2-E16-016"/>
-          <p:cNvCxnSpPr/>
-          <p:nvPr/>
-        </p:nvCxnSpPr>
-        <p:spPr>
-          <a:xfrm flipV="1">
-            <a:off x="7370064" y="3693514"/>
-            <a:ext cx="100584" cy="50534"/>
-          </a:xfrm>
-          <a:prstGeom prst="line">
-            <a:avLst/>
-          </a:prstGeom>
-          <a:ln w="25400">
-            <a:solidFill>
-              <a:srgbClr val="8EDBD4"/>
-            </a:solidFill>
-          </a:ln>
-          <a:effectLst/>
-        </p:spPr>
-      </p:cxnSp>
-      <p:cxnSp>
-        <p:nvCxnSpPr>
-          <p:cNvPr id="18" name="line17" descr="sci-ppt:C2-E16-017"/>
-          <p:cNvCxnSpPr/>
-          <p:nvPr/>
-        </p:nvCxnSpPr>
-        <p:spPr>
-          <a:xfrm flipV="1">
-            <a:off x="7470648" y="3638092"/>
-            <a:ext cx="100583" cy="55422"/>
-          </a:xfrm>
-          <a:prstGeom prst="line">
-            <a:avLst/>
-          </a:prstGeom>
-          <a:ln w="25400">
-            <a:solidFill>
-              <a:srgbClr val="8EDBD4"/>
-            </a:solidFill>
-          </a:ln>
-          <a:effectLst/>
-        </p:spPr>
-      </p:cxnSp>
-      <p:cxnSp>
-        <p:nvCxnSpPr>
-          <p:cNvPr id="19" name="line18" descr="sci-ppt:C2-E16-018"/>
-          <p:cNvCxnSpPr/>
-          <p:nvPr/>
-        </p:nvCxnSpPr>
-        <p:spPr>
-          <a:xfrm flipV="1">
-            <a:off x="7571231" y="3578556"/>
-            <a:ext cx="100585" cy="59536"/>
-          </a:xfrm>
-          <a:prstGeom prst="line">
-            <a:avLst/>
-          </a:prstGeom>
-          <a:ln w="25400">
-            <a:solidFill>
-              <a:srgbClr val="8EDBD4"/>
-            </a:solidFill>
-          </a:ln>
-          <a:effectLst/>
-        </p:spPr>
-      </p:cxnSp>
-      <p:cxnSp>
-        <p:nvCxnSpPr>
-          <p:cNvPr id="20" name="line19" descr="sci-ppt:C2-E16-019"/>
-          <p:cNvCxnSpPr/>
-          <p:nvPr/>
-        </p:nvCxnSpPr>
-        <p:spPr>
-          <a:xfrm flipV="1">
-            <a:off x="7671816" y="3515677"/>
-            <a:ext cx="100584" cy="62879"/>
-          </a:xfrm>
-          <a:prstGeom prst="line">
-            <a:avLst/>
-          </a:prstGeom>
-          <a:ln w="25400">
-            <a:solidFill>
-              <a:srgbClr val="8EDBD4"/>
-            </a:solidFill>
-          </a:ln>
-          <a:effectLst/>
-        </p:spPr>
-      </p:cxnSp>
-      <p:cxnSp>
-        <p:nvCxnSpPr>
-          <p:cNvPr id="21" name="line20" descr="sci-ppt:C2-E16-020"/>
-          <p:cNvCxnSpPr/>
-          <p:nvPr/>
-        </p:nvCxnSpPr>
-        <p:spPr>
-          <a:xfrm flipV="1">
-            <a:off x="7772400" y="3450226"/>
-            <a:ext cx="100583" cy="65451"/>
-          </a:xfrm>
-          <a:prstGeom prst="line">
-            <a:avLst/>
-          </a:prstGeom>
-          <a:ln w="25400">
-            <a:solidFill>
-              <a:srgbClr val="8EDBD4"/>
-            </a:solidFill>
-          </a:ln>
-          <a:effectLst/>
-        </p:spPr>
-      </p:cxnSp>
-      <p:cxnSp>
-        <p:nvCxnSpPr>
-          <p:cNvPr id="22" name="line21" descr="sci-ppt:C2-E16-021"/>
-          <p:cNvCxnSpPr/>
-          <p:nvPr/>
-        </p:nvCxnSpPr>
-        <p:spPr>
-          <a:xfrm flipV="1">
-            <a:off x="7872983" y="3382975"/>
-            <a:ext cx="100585" cy="67251"/>
-          </a:xfrm>
-          <a:prstGeom prst="line">
-            <a:avLst/>
-          </a:prstGeom>
-          <a:ln w="25400">
-            <a:solidFill>
-              <a:srgbClr val="8EDBD4"/>
-            </a:solidFill>
-          </a:ln>
-          <a:effectLst/>
-        </p:spPr>
-      </p:cxnSp>
-      <p:cxnSp>
-        <p:nvCxnSpPr>
-          <p:cNvPr id="23" name="line22" descr="sci-ppt:C2-E16-022"/>
-          <p:cNvCxnSpPr/>
-          <p:nvPr/>
-        </p:nvCxnSpPr>
-        <p:spPr>
-          <a:xfrm flipV="1">
-            <a:off x="7973568" y="3314695"/>
-            <a:ext cx="100584" cy="68280"/>
-          </a:xfrm>
-          <a:prstGeom prst="line">
-            <a:avLst/>
-          </a:prstGeom>
-          <a:ln w="25400">
-            <a:solidFill>
-              <a:srgbClr val="8EDBD4"/>
-            </a:solidFill>
-          </a:ln>
-          <a:effectLst/>
-        </p:spPr>
-      </p:cxnSp>
-      <p:cxnSp>
-        <p:nvCxnSpPr>
-          <p:cNvPr id="24" name="line23" descr="sci-ppt:C2-E16-023"/>
-          <p:cNvCxnSpPr/>
-          <p:nvPr/>
-        </p:nvCxnSpPr>
-        <p:spPr>
-          <a:xfrm flipV="1">
-            <a:off x="8074152" y="3246158"/>
-            <a:ext cx="100584" cy="68537"/>
-          </a:xfrm>
-          <a:prstGeom prst="line">
-            <a:avLst/>
-          </a:prstGeom>
-          <a:ln w="25400">
-            <a:solidFill>
-              <a:srgbClr val="8EDBD4"/>
-            </a:solidFill>
-          </a:ln>
-          <a:effectLst/>
-        </p:spPr>
-      </p:cxnSp>
-      <p:cxnSp>
-        <p:nvCxnSpPr>
-          <p:cNvPr id="25" name="line24" descr="sci-ppt:C2-E16-024"/>
-          <p:cNvCxnSpPr/>
-          <p:nvPr/>
-        </p:nvCxnSpPr>
-        <p:spPr>
-          <a:xfrm flipV="1">
-            <a:off x="8174736" y="3178135"/>
-            <a:ext cx="100584" cy="68023"/>
-          </a:xfrm>
-          <a:prstGeom prst="line">
-            <a:avLst/>
-          </a:prstGeom>
-          <a:ln w="25400">
-            <a:solidFill>
-              <a:srgbClr val="8EDBD4"/>
-            </a:solidFill>
-          </a:ln>
-          <a:effectLst/>
-        </p:spPr>
-      </p:cxnSp>
-      <p:cxnSp>
-        <p:nvCxnSpPr>
-          <p:cNvPr id="26" name="line25" descr="sci-ppt:C2-E16-025"/>
-          <p:cNvCxnSpPr/>
-          <p:nvPr/>
-        </p:nvCxnSpPr>
-        <p:spPr>
-          <a:xfrm flipV="1">
-            <a:off x="8275320" y="3111398"/>
-            <a:ext cx="100584" cy="66737"/>
-          </a:xfrm>
-          <a:prstGeom prst="line">
-            <a:avLst/>
-          </a:prstGeom>
-          <a:ln w="25400">
-            <a:solidFill>
-              <a:srgbClr val="8EDBD4"/>
-            </a:solidFill>
-          </a:ln>
-          <a:effectLst/>
-        </p:spPr>
-      </p:cxnSp>
-      <p:cxnSp>
-        <p:nvCxnSpPr>
-          <p:cNvPr id="27" name="line26" descr="sci-ppt:C2-E16-026"/>
-          <p:cNvCxnSpPr/>
-          <p:nvPr/>
-        </p:nvCxnSpPr>
-        <p:spPr>
-          <a:xfrm flipV="1">
-            <a:off x="8375904" y="3046718"/>
-            <a:ext cx="100584" cy="64680"/>
-          </a:xfrm>
-          <a:prstGeom prst="line">
-            <a:avLst/>
-          </a:prstGeom>
-          <a:ln w="25400">
-            <a:solidFill>
-              <a:srgbClr val="8EDBD4"/>
-            </a:solidFill>
-          </a:ln>
-          <a:effectLst/>
-        </p:spPr>
-      </p:cxnSp>
-      <p:cxnSp>
-        <p:nvCxnSpPr>
-          <p:cNvPr id="28" name="line27" descr="sci-ppt:C2-E16-027"/>
-          <p:cNvCxnSpPr/>
-          <p:nvPr/>
-        </p:nvCxnSpPr>
-        <p:spPr>
-          <a:xfrm flipV="1">
-            <a:off x="8476488" y="2984868"/>
-            <a:ext cx="100584" cy="61850"/>
-          </a:xfrm>
-          <a:prstGeom prst="line">
-            <a:avLst/>
-          </a:prstGeom>
-          <a:ln w="25400">
-            <a:solidFill>
-              <a:srgbClr val="8EDBD4"/>
-            </a:solidFill>
-          </a:ln>
-          <a:effectLst/>
-        </p:spPr>
-      </p:cxnSp>
-      <p:cxnSp>
-        <p:nvCxnSpPr>
-          <p:cNvPr id="29" name="line28" descr="sci-ppt:C2-E16-028"/>
-          <p:cNvCxnSpPr/>
-          <p:nvPr/>
-        </p:nvCxnSpPr>
-        <p:spPr>
-          <a:xfrm flipV="1">
-            <a:off x="8577072" y="2926618"/>
-            <a:ext cx="100584" cy="58250"/>
-          </a:xfrm>
-          <a:prstGeom prst="line">
-            <a:avLst/>
-          </a:prstGeom>
-          <a:ln w="25400">
-            <a:solidFill>
-              <a:srgbClr val="8EDBD4"/>
-            </a:solidFill>
-          </a:ln>
-          <a:effectLst/>
-        </p:spPr>
-      </p:cxnSp>
-      <p:cxnSp>
-        <p:nvCxnSpPr>
-          <p:cNvPr id="30" name="line29" descr="sci-ppt:C2-E16-029"/>
-          <p:cNvCxnSpPr/>
-          <p:nvPr/>
-        </p:nvCxnSpPr>
-        <p:spPr>
-          <a:xfrm flipV="1">
-            <a:off x="8677656" y="2872740"/>
-            <a:ext cx="100584" cy="53878"/>
-          </a:xfrm>
-          <a:prstGeom prst="line">
-            <a:avLst/>
-          </a:prstGeom>
-          <a:ln w="25400">
-            <a:solidFill>
-              <a:srgbClr val="8EDBD4"/>
-            </a:solidFill>
-          </a:ln>
-          <a:effectLst/>
-        </p:spPr>
-      </p:cxnSp>
-      <p:cxnSp>
-        <p:nvCxnSpPr>
-          <p:cNvPr id="31" name="line30" descr="sci-ppt:C2-E16-030"/>
-          <p:cNvCxnSpPr/>
-          <p:nvPr/>
-        </p:nvCxnSpPr>
-        <p:spPr>
-          <a:xfrm flipV="1">
-            <a:off x="8778240" y="2824005"/>
-            <a:ext cx="100584" cy="48735"/>
-          </a:xfrm>
-          <a:prstGeom prst="line">
-            <a:avLst/>
-          </a:prstGeom>
-          <a:ln w="25400">
-            <a:solidFill>
-              <a:srgbClr val="8EDBD4"/>
-            </a:solidFill>
-          </a:ln>
-          <a:effectLst/>
-        </p:spPr>
-      </p:cxnSp>
-      <p:cxnSp>
-        <p:nvCxnSpPr>
-          <p:cNvPr id="32" name="line31" descr="sci-ppt:C2-E16-031"/>
-          <p:cNvCxnSpPr/>
-          <p:nvPr/>
-        </p:nvCxnSpPr>
-        <p:spPr>
-          <a:xfrm flipV="1">
-            <a:off x="8878824" y="2781185"/>
-            <a:ext cx="100584" cy="42820"/>
-          </a:xfrm>
-          <a:prstGeom prst="line">
-            <a:avLst/>
-          </a:prstGeom>
-          <a:ln w="25400">
-            <a:solidFill>
-              <a:srgbClr val="8EDBD4"/>
-            </a:solidFill>
-          </a:ln>
-          <a:effectLst/>
-        </p:spPr>
-      </p:cxnSp>
-      <p:cxnSp>
-        <p:nvCxnSpPr>
-          <p:cNvPr id="33" name="line32" descr="sci-ppt:C2-E16-032"/>
-          <p:cNvCxnSpPr/>
-          <p:nvPr/>
-        </p:nvCxnSpPr>
-        <p:spPr>
-          <a:xfrm flipV="1">
-            <a:off x="8979408" y="2745052"/>
-            <a:ext cx="100584" cy="36133"/>
-          </a:xfrm>
-          <a:prstGeom prst="line">
-            <a:avLst/>
-          </a:prstGeom>
-          <a:ln w="25400">
-            <a:solidFill>
-              <a:srgbClr val="8EDBD4"/>
-            </a:solidFill>
-          </a:ln>
-          <a:effectLst/>
-        </p:spPr>
-      </p:cxnSp>
-      <p:cxnSp>
-        <p:nvCxnSpPr>
-          <p:cNvPr id="34" name="line33" descr="sci-ppt:C2-E16-033"/>
-          <p:cNvCxnSpPr/>
-          <p:nvPr/>
-        </p:nvCxnSpPr>
-        <p:spPr>
-          <a:xfrm flipV="1">
-            <a:off x="9079992" y="2716377"/>
-            <a:ext cx="100584" cy="28675"/>
-          </a:xfrm>
-          <a:prstGeom prst="line">
-            <a:avLst/>
-          </a:prstGeom>
-          <a:ln w="25400">
-            <a:solidFill>
-              <a:srgbClr val="8EDBD4"/>
-            </a:solidFill>
-          </a:ln>
-          <a:effectLst/>
-        </p:spPr>
-      </p:cxnSp>
-      <p:cxnSp>
-        <p:nvCxnSpPr>
-          <p:cNvPr id="35" name="line34" descr="sci-ppt:C2-E16-034"/>
-          <p:cNvCxnSpPr/>
-          <p:nvPr/>
-        </p:nvCxnSpPr>
-        <p:spPr>
-          <a:xfrm flipV="1">
-            <a:off x="9180576" y="2695932"/>
-            <a:ext cx="100584" cy="20445"/>
-          </a:xfrm>
-          <a:prstGeom prst="line">
-            <a:avLst/>
-          </a:prstGeom>
-          <a:ln w="25400">
-            <a:solidFill>
-              <a:srgbClr val="8EDBD4"/>
-            </a:solidFill>
-          </a:ln>
-          <a:effectLst/>
-        </p:spPr>
-      </p:cxnSp>
-      <p:cxnSp>
-        <p:nvCxnSpPr>
-          <p:cNvPr id="36" name="line35" descr="sci-ppt:C2-E16-035"/>
-          <p:cNvCxnSpPr/>
-          <p:nvPr/>
-        </p:nvCxnSpPr>
-        <p:spPr>
-          <a:xfrm flipV="1">
-            <a:off x="9281160" y="2684487"/>
-            <a:ext cx="100584" cy="11445"/>
-          </a:xfrm>
-          <a:prstGeom prst="line">
-            <a:avLst/>
-          </a:prstGeom>
-          <a:ln w="25400">
-            <a:solidFill>
-              <a:srgbClr val="8EDBD4"/>
-            </a:solidFill>
-          </a:ln>
-          <a:effectLst/>
-        </p:spPr>
-      </p:cxnSp>
-      <p:cxnSp>
-        <p:nvCxnSpPr>
-          <p:cNvPr id="37" name="line36" descr="sci-ppt:C2-E16-036"/>
-          <p:cNvCxnSpPr/>
-          <p:nvPr/>
-        </p:nvCxnSpPr>
-        <p:spPr>
-          <a:xfrm flipV="1">
-            <a:off x="9381744" y="2682816"/>
-            <a:ext cx="100584" cy="1671"/>
-          </a:xfrm>
-          <a:prstGeom prst="line">
-            <a:avLst/>
-          </a:prstGeom>
-          <a:ln w="25400">
-            <a:solidFill>
-              <a:srgbClr val="8EDBD4"/>
-            </a:solidFill>
-          </a:ln>
-          <a:effectLst/>
-        </p:spPr>
-      </p:cxnSp>
-      <p:cxnSp>
-        <p:nvCxnSpPr>
-          <p:cNvPr id="38" name="line37" descr="sci-ppt:C2-E16-037"/>
-          <p:cNvCxnSpPr/>
-          <p:nvPr/>
-        </p:nvCxnSpPr>
-        <p:spPr>
-          <a:xfrm>
-            <a:off x="9482328" y="2682816"/>
-            <a:ext cx="100584" cy="8872"/>
-          </a:xfrm>
-          <a:prstGeom prst="line">
-            <a:avLst/>
-          </a:prstGeom>
-          <a:ln w="25400">
-            <a:solidFill>
-              <a:srgbClr val="8EDBD4"/>
-            </a:solidFill>
-          </a:ln>
-          <a:effectLst/>
-        </p:spPr>
-      </p:cxnSp>
-      <p:cxnSp>
-        <p:nvCxnSpPr>
-          <p:cNvPr id="39" name="line38" descr="sci-ppt:C2-E16-038"/>
-          <p:cNvCxnSpPr/>
-          <p:nvPr/>
-        </p:nvCxnSpPr>
-        <p:spPr>
-          <a:xfrm>
-            <a:off x="9582912" y="2691688"/>
-            <a:ext cx="100584" cy="20189"/>
-          </a:xfrm>
-          <a:prstGeom prst="line">
-            <a:avLst/>
-          </a:prstGeom>
-          <a:ln w="25400">
-            <a:solidFill>
-              <a:srgbClr val="8EDBD4"/>
-            </a:solidFill>
-          </a:ln>
-          <a:effectLst/>
-        </p:spPr>
-      </p:cxnSp>
-      <p:cxnSp>
-        <p:nvCxnSpPr>
-          <p:cNvPr id="40" name="line39" descr="sci-ppt:C2-E16-039"/>
-          <p:cNvCxnSpPr/>
-          <p:nvPr/>
-        </p:nvCxnSpPr>
-        <p:spPr>
-          <a:xfrm>
-            <a:off x="9683496" y="2711877"/>
-            <a:ext cx="100584" cy="32275"/>
-          </a:xfrm>
-          <a:prstGeom prst="line">
-            <a:avLst/>
-          </a:prstGeom>
-          <a:ln w="25400">
-            <a:solidFill>
-              <a:srgbClr val="8EDBD4"/>
-            </a:solidFill>
-          </a:ln>
-          <a:effectLst/>
-        </p:spPr>
-      </p:cxnSp>
-      <p:cxnSp>
-        <p:nvCxnSpPr>
-          <p:cNvPr id="41" name="line40" descr="sci-ppt:C2-E16-040"/>
-          <p:cNvCxnSpPr/>
-          <p:nvPr/>
-        </p:nvCxnSpPr>
-        <p:spPr>
-          <a:xfrm>
-            <a:off x="9784080" y="2744152"/>
-            <a:ext cx="100584" cy="45134"/>
-          </a:xfrm>
-          <a:prstGeom prst="line">
-            <a:avLst/>
-          </a:prstGeom>
-          <a:ln w="25400">
-            <a:solidFill>
-              <a:srgbClr val="8EDBD4"/>
-            </a:solidFill>
-          </a:ln>
-          <a:effectLst/>
-        </p:spPr>
-      </p:cxnSp>
-      <p:cxnSp>
-        <p:nvCxnSpPr>
-          <p:cNvPr id="42" name="line41" descr="sci-ppt:C2-E16-041"/>
-          <p:cNvCxnSpPr/>
-          <p:nvPr/>
-        </p:nvCxnSpPr>
-        <p:spPr>
-          <a:xfrm>
-            <a:off x="9884664" y="2789286"/>
-            <a:ext cx="100584" cy="58765"/>
-          </a:xfrm>
-          <a:prstGeom prst="line">
-            <a:avLst/>
-          </a:prstGeom>
-          <a:ln w="25400">
-            <a:solidFill>
-              <a:srgbClr val="8EDBD4"/>
-            </a:solidFill>
-          </a:ln>
-          <a:effectLst/>
-        </p:spPr>
-      </p:cxnSp>
-      <p:cxnSp>
-        <p:nvCxnSpPr>
-          <p:cNvPr id="43" name="line42" descr="sci-ppt:C2-E16-042"/>
-          <p:cNvCxnSpPr/>
-          <p:nvPr/>
-        </p:nvCxnSpPr>
-        <p:spPr>
-          <a:xfrm>
-            <a:off x="9985248" y="2848051"/>
-            <a:ext cx="100584" cy="73166"/>
-          </a:xfrm>
-          <a:prstGeom prst="line">
-            <a:avLst/>
-          </a:prstGeom>
-          <a:ln w="25400">
-            <a:solidFill>
-              <a:srgbClr val="8EDBD4"/>
-            </a:solidFill>
-          </a:ln>
-          <a:effectLst/>
-        </p:spPr>
-      </p:cxnSp>
-      <p:cxnSp>
-        <p:nvCxnSpPr>
-          <p:cNvPr id="44" name="line43" descr="sci-ppt:C2-E16-043"/>
-          <p:cNvCxnSpPr/>
-          <p:nvPr/>
-        </p:nvCxnSpPr>
-        <p:spPr>
-          <a:xfrm>
-            <a:off x="10085832" y="2921217"/>
-            <a:ext cx="100584" cy="88340"/>
-          </a:xfrm>
-          <a:prstGeom prst="line">
-            <a:avLst/>
-          </a:prstGeom>
-          <a:ln w="25400">
-            <a:solidFill>
-              <a:srgbClr val="8EDBD4"/>
-            </a:solidFill>
-          </a:ln>
-          <a:effectLst/>
-        </p:spPr>
-      </p:cxnSp>
-      <p:cxnSp>
-        <p:nvCxnSpPr>
-          <p:cNvPr id="45" name="line44" descr="sci-ppt:C2-E16-044"/>
-          <p:cNvCxnSpPr/>
-          <p:nvPr/>
-        </p:nvCxnSpPr>
-        <p:spPr>
-          <a:xfrm>
-            <a:off x="10186416" y="3009557"/>
-            <a:ext cx="100584" cy="104284"/>
-          </a:xfrm>
-          <a:prstGeom prst="line">
-            <a:avLst/>
-          </a:prstGeom>
-          <a:ln w="25400">
-            <a:solidFill>
-              <a:srgbClr val="8EDBD4"/>
-            </a:solidFill>
-          </a:ln>
-          <a:effectLst/>
-        </p:spPr>
-      </p:cxnSp>
-      <p:cxnSp>
-        <p:nvCxnSpPr>
-          <p:cNvPr id="46" name="line45" descr="sci-ppt:C2-E16-045"/>
-          <p:cNvCxnSpPr/>
-          <p:nvPr/>
-        </p:nvCxnSpPr>
-        <p:spPr>
-          <a:xfrm>
-            <a:off x="10287000" y="3113841"/>
-            <a:ext cx="100584" cy="121001"/>
-          </a:xfrm>
-          <a:prstGeom prst="line">
-            <a:avLst/>
-          </a:prstGeom>
-          <a:ln w="25400">
-            <a:solidFill>
-              <a:srgbClr val="8EDBD4"/>
-            </a:solidFill>
-          </a:ln>
-          <a:effectLst/>
-        </p:spPr>
-      </p:cxnSp>
-      <p:cxnSp>
-        <p:nvCxnSpPr>
-          <p:cNvPr id="47" name="line46" descr="sci-ppt:C2-E16-046"/>
-          <p:cNvCxnSpPr/>
-          <p:nvPr/>
-        </p:nvCxnSpPr>
-        <p:spPr>
-          <a:xfrm>
-            <a:off x="10387584" y="3234842"/>
-            <a:ext cx="100584" cy="138489"/>
-          </a:xfrm>
-          <a:prstGeom prst="line">
-            <a:avLst/>
-          </a:prstGeom>
-          <a:ln w="25400">
-            <a:solidFill>
-              <a:srgbClr val="8EDBD4"/>
-            </a:solidFill>
-          </a:ln>
-          <a:effectLst/>
-        </p:spPr>
-      </p:cxnSp>
-      <p:cxnSp>
-        <p:nvCxnSpPr>
-          <p:cNvPr id="48" name="line47" descr="sci-ppt:C2-E16-047"/>
-          <p:cNvCxnSpPr/>
-          <p:nvPr/>
-        </p:nvCxnSpPr>
-        <p:spPr>
-          <a:xfrm>
-            <a:off x="10488168" y="3373331"/>
-            <a:ext cx="100584" cy="156748"/>
-          </a:xfrm>
-          <a:prstGeom prst="line">
-            <a:avLst/>
-          </a:prstGeom>
-          <a:ln w="25400">
-            <a:solidFill>
-              <a:srgbClr val="8EDBD4"/>
-            </a:solidFill>
-          </a:ln>
-          <a:effectLst/>
-        </p:spPr>
-      </p:cxnSp>
-      <p:cxnSp>
-        <p:nvCxnSpPr>
-          <p:cNvPr id="49" name="line48" descr="sci-ppt:C2-E16-048"/>
-          <p:cNvCxnSpPr/>
-          <p:nvPr/>
-        </p:nvCxnSpPr>
-        <p:spPr>
-          <a:xfrm>
-            <a:off x="10588752" y="3530079"/>
-            <a:ext cx="100584" cy="175779"/>
-          </a:xfrm>
-          <a:prstGeom prst="line">
-            <a:avLst/>
-          </a:prstGeom>
-          <a:ln w="25400">
-            <a:solidFill>
-              <a:srgbClr val="8EDBD4"/>
-            </a:solidFill>
-          </a:ln>
-          <a:effectLst/>
-        </p:spPr>
-      </p:cxnSp>
-      <p:cxnSp>
-        <p:nvCxnSpPr>
-          <p:cNvPr id="50" name="line49" descr="sci-ppt:C2-E16-049"/>
-          <p:cNvCxnSpPr/>
-          <p:nvPr/>
-        </p:nvCxnSpPr>
-        <p:spPr>
-          <a:xfrm>
-            <a:off x="10689336" y="3705858"/>
-            <a:ext cx="100584" cy="195582"/>
-          </a:xfrm>
-          <a:prstGeom prst="line">
-            <a:avLst/>
-          </a:prstGeom>
-          <a:ln w="25400">
-            <a:solidFill>
-              <a:srgbClr val="8EDBD4"/>
-            </a:solidFill>
-          </a:ln>
-          <a:effectLst/>
-        </p:spPr>
-      </p:cxnSp>
-      <p:sp>
-        <p:nvSpPr>
-          <p:cNvPr id="51" name="text50" descr="sci-ppt:C2-E16-050"/>
+              <a:t>Illustrative σᵥₚ = 0.010 N/m (assumed), T = 323 K. Thermal fluctuations alone rarely cross barriers of many k_B T.</a:t>
+            </a:r>
+          </a:p>
+        </p:txBody>
+      </p:sp>
+      <p:sp>
+        <p:nvSpPr>
+          <p:cNvPr id="44" name="C2-E16 text 42" descr="sci-ppt:o042"/>
           <p:cNvSpPr txBox="1"/>
           <p:nvPr/>
         </p:nvSpPr>
         <p:spPr>
           <a:xfrm>
-            <a:off x="8595360" y="2194560"/>
-            <a:ext cx="2194560" cy="377952"/>
+            <a:off x="320040" y="6510528"/>
+            <a:ext cx="11521440" cy="200660"/>
           </a:xfrm>
           <a:prstGeom prst="rect">
             <a:avLst/>
@@ -4306,7 +4770,7 @@
           <a:effectLst/>
         </p:spPr>
         <p:txBody>
-          <a:bodyPr wrap="none" lIns="27432" rIns="27432" tIns="18288" bIns="18288" anchor="ctr">
+          <a:bodyPr wrap="none" lIns="18288" rIns="18288" tIns="18288" bIns="18288" anchor="t">
             <a:spAutoFit/>
           </a:bodyPr>
           <a:lstStyle/>
@@ -4317,293 +4781,13 @@
               </a:spcAft>
             </a:pPr>
             <a:r>
-              <a:rPr sz="1920" b="0" i="0">
-                <a:solidFill>
-                  <a:srgbClr val="E7F0F3"/>
-                </a:solidFill>
-                <a:latin typeface="Arial"/>
-              </a:rPr>
-              <a:t>r*, W*</a:t>
-            </a:r>
-          </a:p>
-        </p:txBody>
-      </p:sp>
-      <p:sp>
-        <p:nvSpPr>
-          <p:cNvPr id="52" name="text51" descr="sci-ppt:C2-E16-051"/>
-          <p:cNvSpPr txBox="1"/>
-          <p:nvPr/>
-        </p:nvSpPr>
-        <p:spPr>
-          <a:xfrm>
-            <a:off x="365760" y="4974336"/>
-            <a:ext cx="5547360" cy="321259"/>
-          </a:xfrm>
-          <a:prstGeom prst="rect">
-            <a:avLst/>
-          </a:prstGeom>
-          <a:noFill/>
-          <a:effectLst/>
-        </p:spPr>
-        <p:txBody>
-          <a:bodyPr wrap="none" lIns="27432" rIns="27432" tIns="18288" bIns="18288" anchor="ctr">
-            <a:spAutoFit/>
-          </a:bodyPr>
-          <a:lstStyle/>
-          <a:p>
-            <a:pPr algn="l">
-              <a:spcAft>
-                <a:spcPts val="0"/>
-              </a:spcAft>
-            </a:pPr>
-            <a:r>
-              <a:rPr sz="1632" b="0" i="0">
-                <a:solidFill>
-                  <a:srgbClr val="E7F0F3"/>
-                </a:solidFill>
-                <a:latin typeface="Arial"/>
-              </a:rPr>
-              <a:t>W_*: free-energy maximum</a:t>
-            </a:r>
-          </a:p>
-        </p:txBody>
-      </p:sp>
-      <p:sp>
-        <p:nvSpPr>
-          <p:cNvPr id="53" name="text52" descr="sci-ppt:C2-E16-052"/>
-          <p:cNvSpPr txBox="1"/>
-          <p:nvPr/>
-        </p:nvSpPr>
-        <p:spPr>
-          <a:xfrm>
-            <a:off x="365760" y="5266944"/>
-            <a:ext cx="5547360" cy="321259"/>
-          </a:xfrm>
-          <a:prstGeom prst="rect">
-            <a:avLst/>
-          </a:prstGeom>
-          <a:noFill/>
-          <a:effectLst/>
-        </p:spPr>
-        <p:txBody>
-          <a:bodyPr wrap="none" lIns="27432" rIns="27432" tIns="18288" bIns="18288" anchor="ctr">
-            <a:spAutoFit/>
-          </a:bodyPr>
-          <a:lstStyle/>
-          <a:p>
-            <a:pPr algn="l">
-              <a:spcAft>
-                <a:spcPts val="0"/>
-              </a:spcAft>
-            </a:pPr>
-            <a:r>
-              <a:rPr sz="1632" b="0" i="0">
-                <a:solidFill>
-                  <a:srgbClr val="E7F0F3"/>
-                </a:solidFill>
-                <a:latin typeface="Arial"/>
-              </a:rPr>
-              <a:t>σ_vp³: strong tension dependence</a:t>
-            </a:r>
-          </a:p>
-        </p:txBody>
-      </p:sp>
-      <p:sp>
-        <p:nvSpPr>
-          <p:cNvPr id="54" name="text53" descr="sci-ppt:C2-E16-053"/>
-          <p:cNvSpPr txBox="1"/>
-          <p:nvPr/>
-        </p:nvSpPr>
-        <p:spPr>
-          <a:xfrm>
-            <a:off x="365760" y="5559552"/>
-            <a:ext cx="5547360" cy="321259"/>
-          </a:xfrm>
-          <a:prstGeom prst="rect">
-            <a:avLst/>
-          </a:prstGeom>
-          <a:noFill/>
-          <a:effectLst/>
-        </p:spPr>
-        <p:txBody>
-          <a:bodyPr wrap="none" lIns="27432" rIns="27432" tIns="18288" bIns="18288" anchor="ctr">
-            <a:spAutoFit/>
-          </a:bodyPr>
-          <a:lstStyle/>
-          <a:p>
-            <a:pPr algn="l">
-              <a:spcAft>
-                <a:spcPts val="0"/>
-              </a:spcAft>
-            </a:pPr>
-            <a:r>
-              <a:rPr sz="1632" b="0" i="0">
-                <a:solidFill>
-                  <a:srgbClr val="E7F0F3"/>
-                </a:solidFill>
-                <a:latin typeface="Arial"/>
-              </a:rPr>
-              <a:t>π: spherical geometry</a:t>
-            </a:r>
-          </a:p>
-        </p:txBody>
-      </p:sp>
-      <p:sp>
-        <p:nvSpPr>
-          <p:cNvPr id="55" name="text54" descr="sci-ppt:C2-E16-054"/>
-          <p:cNvSpPr txBox="1"/>
-          <p:nvPr/>
-        </p:nvSpPr>
-        <p:spPr>
-          <a:xfrm>
-            <a:off x="6156960" y="4974336"/>
-            <a:ext cx="5547360" cy="321259"/>
-          </a:xfrm>
-          <a:prstGeom prst="rect">
-            <a:avLst/>
-          </a:prstGeom>
-          <a:noFill/>
-          <a:effectLst/>
-        </p:spPr>
-        <p:txBody>
-          <a:bodyPr wrap="none" lIns="27432" rIns="27432" tIns="18288" bIns="18288" anchor="ctr">
-            <a:spAutoFit/>
-          </a:bodyPr>
-          <a:lstStyle/>
-          <a:p>
-            <a:pPr algn="l">
-              <a:spcAft>
-                <a:spcPts val="0"/>
-              </a:spcAft>
-            </a:pPr>
-            <a:r>
-              <a:rPr sz="1632" b="0" i="0">
-                <a:solidFill>
-                  <a:srgbClr val="E7F0F3"/>
-                </a:solidFill>
-                <a:latin typeface="Arial"/>
-              </a:rPr>
-              <a:t>r_*: critical radius</a:t>
-            </a:r>
-          </a:p>
-        </p:txBody>
-      </p:sp>
-      <p:sp>
-        <p:nvSpPr>
-          <p:cNvPr id="56" name="text55" descr="sci-ppt:C2-E16-055"/>
-          <p:cNvSpPr txBox="1"/>
-          <p:nvPr/>
-        </p:nvSpPr>
-        <p:spPr>
-          <a:xfrm>
-            <a:off x="6156960" y="5266944"/>
-            <a:ext cx="5547360" cy="321259"/>
-          </a:xfrm>
-          <a:prstGeom prst="rect">
-            <a:avLst/>
-          </a:prstGeom>
-          <a:noFill/>
-          <a:effectLst/>
-        </p:spPr>
-        <p:txBody>
-          <a:bodyPr wrap="none" lIns="27432" rIns="27432" tIns="18288" bIns="18288" anchor="ctr">
-            <a:spAutoFit/>
-          </a:bodyPr>
-          <a:lstStyle/>
-          <a:p>
-            <a:pPr algn="l">
-              <a:spcAft>
-                <a:spcPts val="0"/>
-              </a:spcAft>
-            </a:pPr>
-            <a:r>
-              <a:rPr sz="1632" b="0" i="0">
-                <a:solidFill>
-                  <a:srgbClr val="E7F0F3"/>
-                </a:solidFill>
-                <a:latin typeface="Arial"/>
-              </a:rPr>
-              <a:t>Δp_n²: driving-pressure dependence</a:t>
-            </a:r>
-          </a:p>
-        </p:txBody>
-      </p:sp>
-      <p:sp>
-        <p:nvSpPr>
-          <p:cNvPr id="57" name="text56" descr="sci-ppt:C2-E16-056"/>
-          <p:cNvSpPr txBox="1"/>
-          <p:nvPr/>
-        </p:nvSpPr>
-        <p:spPr>
-          <a:xfrm>
-            <a:off x="365760" y="6278880"/>
-            <a:ext cx="11277600" cy="302361"/>
-          </a:xfrm>
-          <a:prstGeom prst="rect">
-            <a:avLst/>
-          </a:prstGeom>
-          <a:noFill/>
-          <a:effectLst/>
-        </p:spPr>
-        <p:txBody>
-          <a:bodyPr wrap="none" lIns="27432" rIns="27432" tIns="18288" bIns="18288" anchor="ctr">
-            <a:spAutoFit/>
-          </a:bodyPr>
-          <a:lstStyle/>
-          <a:p>
-            <a:pPr algn="l">
-              <a:spcAft>
-                <a:spcPts val="0"/>
-              </a:spcAft>
-            </a:pPr>
-            <a:r>
-              <a:rPr sz="1536" b="0" i="0">
+              <a:rPr sz="1000" b="0" i="0">
                 <a:solidFill>
                   <a:srgbClr val="B4C7D2"/>
                 </a:solidFill>
                 <a:latin typeface="Arial"/>
               </a:rPr>
-              <a:t>Surface energy and displaced-volume contribution evaluated at r_*</a:t>
-            </a:r>
-          </a:p>
-        </p:txBody>
-      </p:sp>
-      <p:sp>
-        <p:nvSpPr>
-          <p:cNvPr id="58" name="text57" descr="sci-ppt:C2-E16-057"/>
-          <p:cNvSpPr txBox="1"/>
-          <p:nvPr/>
-        </p:nvSpPr>
-        <p:spPr>
-          <a:xfrm>
-            <a:off x="365760" y="6571488"/>
-            <a:ext cx="11277600" cy="302361"/>
-          </a:xfrm>
-          <a:prstGeom prst="rect">
-            <a:avLst/>
-          </a:prstGeom>
-          <a:noFill/>
-          <a:effectLst/>
-        </p:spPr>
-        <p:txBody>
-          <a:bodyPr wrap="none" lIns="27432" rIns="27432" tIns="18288" bIns="18288" anchor="ctr">
-            <a:spAutoFit/>
-          </a:bodyPr>
-          <a:lstStyle/>
-          <a:p>
-            <a:pPr algn="l">
-              <a:spcAft>
-                <a:spcPts val="0"/>
-              </a:spcAft>
-            </a:pPr>
-            <a:r>
-              <a:rPr sz="1536" b="0" i="0">
-                <a:solidFill>
-                  <a:srgbClr val="B4C7D2"/>
-                </a:solidFill>
-                <a:latin typeface="Arial"/>
-              </a:rPr>
-              <a:t>A positive driving pressure still leaves a finite barrier</a:t>
+              <a:t>Barrier height of Eq. C2-E16, homogeneous locally isothermal small-nucleus model.</a:t>
             </a:r>
           </a:p>
         </p:txBody>
